--- a/presentation/PatentMind_海報_全開.pptx
+++ b/presentation/PatentMind_海報_全開.pptx
@@ -3088,97 +3088,9 @@
         <p:nvPr/>
       </p:nvGrpSpPr>
       <p:grpSpPr/>
-      <p:sp>
-        <p:nvSpPr>
-          <p:cNvPr id="2" name="Rectangle 1"/>
-          <p:cNvSpPr/>
-          <p:nvPr/>
-        </p:nvSpPr>
-        <p:spPr>
-          <a:xfrm>
-            <a:off x="0" y="0"/>
-            <a:ext cx="28328112" cy="320040"/>
-          </a:xfrm>
-          <a:prstGeom prst="rect">
-            <a:avLst/>
-          </a:prstGeom>
-          <a:solidFill>
-            <a:srgbClr val="F5B020"/>
-          </a:solidFill>
-          <a:ln>
-            <a:noFill/>
-          </a:ln>
-          <a:effectLst/>
-        </p:spPr>
-        <p:style>
-          <a:lnRef idx="1">
-            <a:schemeClr val="accent1"/>
-          </a:lnRef>
-          <a:fillRef idx="3">
-            <a:schemeClr val="accent1"/>
-          </a:fillRef>
-          <a:effectRef idx="2">
-            <a:schemeClr val="accent1"/>
-          </a:effectRef>
-          <a:fontRef idx="minor">
-            <a:schemeClr val="lt1"/>
-          </a:fontRef>
-        </p:style>
-        <p:txBody>
-          <a:bodyPr rtlCol="0" anchor="ctr"/>
-          <a:lstStyle/>
-          <a:p>
-            <a:pPr algn="ctr"/>
-          </a:p>
-        </p:txBody>
-      </p:sp>
-      <p:sp>
-        <p:nvSpPr>
-          <p:cNvPr id="3" name="Rectangle 2"/>
-          <p:cNvSpPr/>
-          <p:nvPr/>
-        </p:nvSpPr>
-        <p:spPr>
-          <a:xfrm>
-            <a:off x="0" y="320040"/>
-            <a:ext cx="28328112" cy="4983480"/>
-          </a:xfrm>
-          <a:prstGeom prst="rect">
-            <a:avLst/>
-          </a:prstGeom>
-          <a:solidFill>
-            <a:srgbClr val="1E3A8A"/>
-          </a:solidFill>
-          <a:ln>
-            <a:noFill/>
-          </a:ln>
-          <a:effectLst/>
-        </p:spPr>
-        <p:style>
-          <a:lnRef idx="1">
-            <a:schemeClr val="accent1"/>
-          </a:lnRef>
-          <a:fillRef idx="3">
-            <a:schemeClr val="accent1"/>
-          </a:fillRef>
-          <a:effectRef idx="2">
-            <a:schemeClr val="accent1"/>
-          </a:effectRef>
-          <a:fontRef idx="minor">
-            <a:schemeClr val="lt1"/>
-          </a:fontRef>
-        </p:style>
-        <p:txBody>
-          <a:bodyPr rtlCol="0" anchor="ctr"/>
-          <a:lstStyle/>
-          <a:p>
-            <a:pPr algn="ctr"/>
-          </a:p>
-        </p:txBody>
-      </p:sp>
       <p:pic>
         <p:nvPicPr>
-          <p:cNvPr id="4" name="Picture 3" descr="logo_word_white.png"/>
+          <p:cNvPr id="2" name="Picture 1" descr="poster_bg.png"/>
           <p:cNvPicPr>
             <a:picLocks noChangeAspect="1"/>
           </p:cNvPicPr>
@@ -3192,24 +3104,48 @@
         </p:blipFill>
         <p:spPr>
           <a:xfrm>
-            <a:off x="1097280" y="868680"/>
-            <a:ext cx="6347650" cy="1325880"/>
+            <a:off x="0" y="0"/>
+            <a:ext cx="28328112" cy="39310056"/>
           </a:xfrm>
           <a:prstGeom prst="rect">
             <a:avLst/>
           </a:prstGeom>
         </p:spPr>
       </p:pic>
-      <p:sp>
-        <p:nvSpPr>
-          <p:cNvPr id="5" name="TextBox 4"/>
+      <p:pic>
+        <p:nvPicPr>
+          <p:cNvPr id="3" name="Picture 2" descr="logo_word_white.png"/>
+          <p:cNvPicPr>
+            <a:picLocks noChangeAspect="1"/>
+          </p:cNvPicPr>
+          <p:nvPr/>
+        </p:nvPicPr>
+        <p:blipFill>
+          <a:blip r:embed="rId3"/>
+          <a:stretch>
+            <a:fillRect/>
+          </a:stretch>
+        </p:blipFill>
+        <p:spPr>
+          <a:xfrm>
+            <a:off x="1097280" y="713232"/>
+            <a:ext cx="5690997" cy="1188720"/>
+          </a:xfrm>
+          <a:prstGeom prst="rect">
+            <a:avLst/>
+          </a:prstGeom>
+        </p:spPr>
+      </p:pic>
+      <p:sp>
+        <p:nvSpPr>
+          <p:cNvPr id="4" name="TextBox 3"/>
           <p:cNvSpPr txBox="1"/>
           <p:nvPr/>
         </p:nvSpPr>
         <p:spPr>
           <a:xfrm>
-            <a:off x="1097280" y="2331720"/>
-            <a:ext cx="26133552" cy="1737360"/>
+            <a:off x="1097280" y="2057400"/>
+            <a:ext cx="26133552" cy="1828800"/>
           </a:xfrm>
           <a:prstGeom prst="rect">
             <a:avLst/>
@@ -3231,7 +3167,7 @@
               </a:spcAft>
             </a:pPr>
             <a:r>
-              <a:rPr sz="12000" b="1">
+              <a:rPr sz="12600" b="1">
                 <a:solidFill>
                   <a:srgbClr val="FFFFFF"/>
                 </a:solidFill>
@@ -3246,14 +3182,14 @@
       </p:sp>
       <p:sp>
         <p:nvSpPr>
-          <p:cNvPr id="6" name="TextBox 5"/>
+          <p:cNvPr id="5" name="TextBox 4"/>
           <p:cNvSpPr txBox="1"/>
           <p:nvPr/>
         </p:nvSpPr>
         <p:spPr>
           <a:xfrm>
-            <a:off x="1143000" y="4069080"/>
-            <a:ext cx="26133552" cy="914400"/>
+            <a:off x="1143000" y="3950208"/>
+            <a:ext cx="22402800" cy="914400"/>
           </a:xfrm>
           <a:prstGeom prst="rect">
             <a:avLst/>
@@ -3275,7 +3211,7 @@
               </a:spcAft>
             </a:pPr>
             <a:r>
-              <a:rPr sz="3400" b="0">
+              <a:rPr sz="3100" b="0">
                 <a:solidFill>
                   <a:srgbClr val="C6D2EE"/>
                 </a:solidFill>
@@ -3283,10 +3219,10 @@
                 <a:ea typeface="Microsoft JhengHei"/>
                 <a:cs typeface="Microsoft JhengHei"/>
               </a:rPr>
-              <a:t>上傳審查意見書，自動分類核駁理由、檢索前案、產出申復書草稿與法定期限 — </a:t>
-            </a:r>
-            <a:r>
-              <a:rPr sz="3400" b="1">
+              <a:t>上傳審查意見書，AI 分類核駁、檢索前案、產出申復書草稿與法定期限　—　</a:t>
+            </a:r>
+            <a:r>
+              <a:rPr sz="3100" b="1">
                 <a:solidFill>
                   <a:srgbClr val="F5B020"/>
                 </a:solidFill>
@@ -3301,16 +3237,376 @@
       </p:sp>
       <p:sp>
         <p:nvSpPr>
-          <p:cNvPr id="7" name="Rectangle 6"/>
+          <p:cNvPr id="6" name="Rounded Rectangle 5"/>
           <p:cNvSpPr/>
           <p:nvPr/>
         </p:nvSpPr>
         <p:spPr>
           <a:xfrm>
-            <a:off x="1097280" y="5824728"/>
-            <a:ext cx="384048" cy="384048"/>
+            <a:off x="1143000" y="4846320"/>
+            <a:ext cx="2359152" cy="603504"/>
+          </a:xfrm>
+          <a:prstGeom prst="roundRect">
+            <a:avLst>
+              <a:gd name="adj" fmla="val 50000"/>
+            </a:avLst>
+          </a:prstGeom>
+          <a:noFill/>
+          <a:ln w="28575">
+            <a:solidFill>
+              <a:srgbClr val="F5B020"/>
+            </a:solidFill>
+          </a:ln>
+          <a:effectLst/>
+        </p:spPr>
+        <p:style>
+          <a:lnRef idx="1">
+            <a:schemeClr val="accent1"/>
+          </a:lnRef>
+          <a:fillRef idx="3">
+            <a:schemeClr val="accent1"/>
+          </a:fillRef>
+          <a:effectRef idx="2">
+            <a:schemeClr val="accent1"/>
+          </a:effectRef>
+          <a:fontRef idx="minor">
+            <a:schemeClr val="lt1"/>
+          </a:fontRef>
+        </p:style>
+        <p:txBody>
+          <a:bodyPr rtlCol="0" anchor="ctr"/>
+          <a:lstStyle/>
+          <a:p>
+            <a:pPr algn="ctr"/>
+          </a:p>
+        </p:txBody>
+      </p:sp>
+      <p:sp>
+        <p:nvSpPr>
+          <p:cNvPr id="7" name="TextBox 6"/>
+          <p:cNvSpPr txBox="1"/>
+          <p:nvPr/>
+        </p:nvSpPr>
+        <p:spPr>
+          <a:xfrm>
+            <a:off x="1143000" y="4846320"/>
+            <a:ext cx="2359152" cy="603504"/>
           </a:xfrm>
           <a:prstGeom prst="rect">
+            <a:avLst/>
+          </a:prstGeom>
+          <a:noFill/>
+        </p:spPr>
+        <p:txBody>
+          <a:bodyPr wrap="square" anchor="ctr" lIns="0" rIns="0" tIns="0" bIns="0">
+            <a:spAutoFit/>
+          </a:bodyPr>
+          <a:lstStyle/>
+          <a:p>
+            <a:pPr algn="ctr">
+              <a:lnSpc>
+                <a:spcPct val="112000"/>
+              </a:lnSpc>
+              <a:spcAft>
+                <a:spcPts val="0"/>
+              </a:spcAft>
+            </a:pPr>
+            <a:r>
+              <a:rPr sz="2300" b="1">
+                <a:solidFill>
+                  <a:srgbClr val="F5B020"/>
+                </a:solidFill>
+                <a:latin typeface="Microsoft JhengHei"/>
+                <a:ea typeface="Microsoft JhengHei"/>
+                <a:cs typeface="Microsoft JhengHei"/>
+              </a:rPr>
+              <a:t>可逆遮罩</a:t>
+            </a:r>
+          </a:p>
+        </p:txBody>
+      </p:sp>
+      <p:sp>
+        <p:nvSpPr>
+          <p:cNvPr id="8" name="Rounded Rectangle 7"/>
+          <p:cNvSpPr/>
+          <p:nvPr/>
+        </p:nvSpPr>
+        <p:spPr>
+          <a:xfrm>
+            <a:off x="3886200" y="4846320"/>
+            <a:ext cx="3127248" cy="603504"/>
+          </a:xfrm>
+          <a:prstGeom prst="roundRect">
+            <a:avLst>
+              <a:gd name="adj" fmla="val 50000"/>
+            </a:avLst>
+          </a:prstGeom>
+          <a:noFill/>
+          <a:ln w="28575">
+            <a:solidFill>
+              <a:srgbClr val="F5B020"/>
+            </a:solidFill>
+          </a:ln>
+          <a:effectLst/>
+        </p:spPr>
+        <p:style>
+          <a:lnRef idx="1">
+            <a:schemeClr val="accent1"/>
+          </a:lnRef>
+          <a:fillRef idx="3">
+            <a:schemeClr val="accent1"/>
+          </a:fillRef>
+          <a:effectRef idx="2">
+            <a:schemeClr val="accent1"/>
+          </a:effectRef>
+          <a:fontRef idx="minor">
+            <a:schemeClr val="lt1"/>
+          </a:fontRef>
+        </p:style>
+        <p:txBody>
+          <a:bodyPr rtlCol="0" anchor="ctr"/>
+          <a:lstStyle/>
+          <a:p>
+            <a:pPr algn="ctr"/>
+          </a:p>
+        </p:txBody>
+      </p:sp>
+      <p:sp>
+        <p:nvSpPr>
+          <p:cNvPr id="9" name="TextBox 8"/>
+          <p:cNvSpPr txBox="1"/>
+          <p:nvPr/>
+        </p:nvSpPr>
+        <p:spPr>
+          <a:xfrm>
+            <a:off x="3886200" y="4846320"/>
+            <a:ext cx="3127248" cy="603504"/>
+          </a:xfrm>
+          <a:prstGeom prst="rect">
+            <a:avLst/>
+          </a:prstGeom>
+          <a:noFill/>
+        </p:spPr>
+        <p:txBody>
+          <a:bodyPr wrap="square" anchor="ctr" lIns="0" rIns="0" tIns="0" bIns="0">
+            <a:spAutoFit/>
+          </a:bodyPr>
+          <a:lstStyle/>
+          <a:p>
+            <a:pPr algn="ctr">
+              <a:lnSpc>
+                <a:spcPct val="112000"/>
+              </a:lnSpc>
+              <a:spcAft>
+                <a:spcPts val="0"/>
+              </a:spcAft>
+            </a:pPr>
+            <a:r>
+              <a:rPr sz="2300" b="1">
+                <a:solidFill>
+                  <a:srgbClr val="F5B020"/>
+                </a:solidFill>
+                <a:latin typeface="Microsoft JhengHei"/>
+                <a:ea typeface="Microsoft JhengHei"/>
+                <a:cs typeface="Microsoft JhengHei"/>
+              </a:rPr>
+              <a:t>引證驗證硬牆</a:t>
+            </a:r>
+          </a:p>
+        </p:txBody>
+      </p:sp>
+      <p:sp>
+        <p:nvSpPr>
+          <p:cNvPr id="10" name="Rounded Rectangle 9"/>
+          <p:cNvSpPr/>
+          <p:nvPr/>
+        </p:nvSpPr>
+        <p:spPr>
+          <a:xfrm>
+            <a:off x="7397496" y="4846320"/>
+            <a:ext cx="3127248" cy="603504"/>
+          </a:xfrm>
+          <a:prstGeom prst="roundRect">
+            <a:avLst>
+              <a:gd name="adj" fmla="val 50000"/>
+            </a:avLst>
+          </a:prstGeom>
+          <a:noFill/>
+          <a:ln w="28575">
+            <a:solidFill>
+              <a:srgbClr val="F5B020"/>
+            </a:solidFill>
+          </a:ln>
+          <a:effectLst/>
+        </p:spPr>
+        <p:style>
+          <a:lnRef idx="1">
+            <a:schemeClr val="accent1"/>
+          </a:lnRef>
+          <a:fillRef idx="3">
+            <a:schemeClr val="accent1"/>
+          </a:fillRef>
+          <a:effectRef idx="2">
+            <a:schemeClr val="accent1"/>
+          </a:effectRef>
+          <a:fontRef idx="minor">
+            <a:schemeClr val="lt1"/>
+          </a:fontRef>
+        </p:style>
+        <p:txBody>
+          <a:bodyPr rtlCol="0" anchor="ctr"/>
+          <a:lstStyle/>
+          <a:p>
+            <a:pPr algn="ctr"/>
+          </a:p>
+        </p:txBody>
+      </p:sp>
+      <p:sp>
+        <p:nvSpPr>
+          <p:cNvPr id="11" name="TextBox 10"/>
+          <p:cNvSpPr txBox="1"/>
+          <p:nvPr/>
+        </p:nvSpPr>
+        <p:spPr>
+          <a:xfrm>
+            <a:off x="7397496" y="4846320"/>
+            <a:ext cx="3127248" cy="603504"/>
+          </a:xfrm>
+          <a:prstGeom prst="rect">
+            <a:avLst/>
+          </a:prstGeom>
+          <a:noFill/>
+        </p:spPr>
+        <p:txBody>
+          <a:bodyPr wrap="square" anchor="ctr" lIns="0" rIns="0" tIns="0" bIns="0">
+            <a:spAutoFit/>
+          </a:bodyPr>
+          <a:lstStyle/>
+          <a:p>
+            <a:pPr algn="ctr">
+              <a:lnSpc>
+                <a:spcPct val="112000"/>
+              </a:lnSpc>
+              <a:spcAft>
+                <a:spcPts val="0"/>
+              </a:spcAft>
+            </a:pPr>
+            <a:r>
+              <a:rPr sz="2300" b="1">
+                <a:solidFill>
+                  <a:srgbClr val="F5B020"/>
+                </a:solidFill>
+                <a:latin typeface="Microsoft JhengHei"/>
+                <a:ea typeface="Microsoft JhengHei"/>
+                <a:cs typeface="Microsoft JhengHei"/>
+              </a:rPr>
+              <a:t>不可竄改稽核</a:t>
+            </a:r>
+          </a:p>
+        </p:txBody>
+      </p:sp>
+      <p:sp>
+        <p:nvSpPr>
+          <p:cNvPr id="12" name="Rounded Rectangle 11"/>
+          <p:cNvSpPr/>
+          <p:nvPr/>
+        </p:nvSpPr>
+        <p:spPr>
+          <a:xfrm>
+            <a:off x="10908792" y="4846320"/>
+            <a:ext cx="3127248" cy="603504"/>
+          </a:xfrm>
+          <a:prstGeom prst="roundRect">
+            <a:avLst>
+              <a:gd name="adj" fmla="val 50000"/>
+            </a:avLst>
+          </a:prstGeom>
+          <a:noFill/>
+          <a:ln w="28575">
+            <a:solidFill>
+              <a:srgbClr val="F5B020"/>
+            </a:solidFill>
+          </a:ln>
+          <a:effectLst/>
+        </p:spPr>
+        <p:style>
+          <a:lnRef idx="1">
+            <a:schemeClr val="accent1"/>
+          </a:lnRef>
+          <a:fillRef idx="3">
+            <a:schemeClr val="accent1"/>
+          </a:fillRef>
+          <a:effectRef idx="2">
+            <a:schemeClr val="accent1"/>
+          </a:effectRef>
+          <a:fontRef idx="minor">
+            <a:schemeClr val="lt1"/>
+          </a:fontRef>
+        </p:style>
+        <p:txBody>
+          <a:bodyPr rtlCol="0" anchor="ctr"/>
+          <a:lstStyle/>
+          <a:p>
+            <a:pPr algn="ctr"/>
+          </a:p>
+        </p:txBody>
+      </p:sp>
+      <p:sp>
+        <p:nvSpPr>
+          <p:cNvPr id="13" name="TextBox 12"/>
+          <p:cNvSpPr txBox="1"/>
+          <p:nvPr/>
+        </p:nvSpPr>
+        <p:spPr>
+          <a:xfrm>
+            <a:off x="10908792" y="4846320"/>
+            <a:ext cx="3127248" cy="603504"/>
+          </a:xfrm>
+          <a:prstGeom prst="rect">
+            <a:avLst/>
+          </a:prstGeom>
+          <a:noFill/>
+        </p:spPr>
+        <p:txBody>
+          <a:bodyPr wrap="square" anchor="ctr" lIns="0" rIns="0" tIns="0" bIns="0">
+            <a:spAutoFit/>
+          </a:bodyPr>
+          <a:lstStyle/>
+          <a:p>
+            <a:pPr algn="ctr">
+              <a:lnSpc>
+                <a:spcPct val="112000"/>
+              </a:lnSpc>
+              <a:spcAft>
+                <a:spcPts val="0"/>
+              </a:spcAft>
+            </a:pPr>
+            <a:r>
+              <a:rPr sz="2300" b="1">
+                <a:solidFill>
+                  <a:srgbClr val="F5B020"/>
+                </a:solidFill>
+                <a:latin typeface="Microsoft JhengHei"/>
+                <a:ea typeface="Microsoft JhengHei"/>
+                <a:cs typeface="Microsoft JhengHei"/>
+              </a:rPr>
+              <a:t>機密強制地端</a:t>
+            </a:r>
+          </a:p>
+        </p:txBody>
+      </p:sp>
+      <p:sp>
+        <p:nvSpPr>
+          <p:cNvPr id="14" name="Oval 13"/>
+          <p:cNvSpPr/>
+          <p:nvPr/>
+        </p:nvSpPr>
+        <p:spPr>
+          <a:xfrm>
+            <a:off x="1097280" y="6949440"/>
+            <a:ext cx="603504" cy="603504"/>
+          </a:xfrm>
+          <a:prstGeom prst="ellipse">
             <a:avLst/>
           </a:prstGeom>
           <a:solidFill>
@@ -3319,7 +3615,13 @@
           <a:ln>
             <a:noFill/>
           </a:ln>
-          <a:effectLst/>
+          <a:effectLst>
+            <a:outerShdw blurRad="110000" dist="42000" dir="5400000" rotWithShape="0">
+              <a:srgbClr val="1A2236">
+                <a:alpha val="24000"/>
+              </a:srgbClr>
+            </a:outerShdw>
+          </a:effectLst>
         </p:spPr>
         <p:style>
           <a:lnRef idx="1">
@@ -3345,14 +3647,58 @@
       </p:sp>
       <p:sp>
         <p:nvSpPr>
-          <p:cNvPr id="8" name="TextBox 7"/>
+          <p:cNvPr id="15" name="TextBox 14"/>
           <p:cNvSpPr txBox="1"/>
           <p:nvPr/>
         </p:nvSpPr>
         <p:spPr>
           <a:xfrm>
-            <a:off x="1737360" y="5715000"/>
-            <a:ext cx="12801600" cy="914400"/>
+            <a:off x="1097280" y="6967727"/>
+            <a:ext cx="603504" cy="566928"/>
+          </a:xfrm>
+          <a:prstGeom prst="rect">
+            <a:avLst/>
+          </a:prstGeom>
+          <a:noFill/>
+        </p:spPr>
+        <p:txBody>
+          <a:bodyPr wrap="square" anchor="ctr" lIns="0" rIns="0" tIns="0" bIns="0">
+            <a:spAutoFit/>
+          </a:bodyPr>
+          <a:lstStyle/>
+          <a:p>
+            <a:pPr algn="ctr">
+              <a:lnSpc>
+                <a:spcPct val="112000"/>
+              </a:lnSpc>
+              <a:spcAft>
+                <a:spcPts val="0"/>
+              </a:spcAft>
+            </a:pPr>
+            <a:r>
+              <a:rPr sz="2700" b="1">
+                <a:solidFill>
+                  <a:srgbClr val="FFFFFF"/>
+                </a:solidFill>
+                <a:latin typeface="Microsoft JhengHei"/>
+                <a:ea typeface="Microsoft JhengHei"/>
+                <a:cs typeface="Microsoft JhengHei"/>
+              </a:rPr>
+              <a:t>01</a:t>
+            </a:r>
+          </a:p>
+        </p:txBody>
+      </p:sp>
+      <p:sp>
+        <p:nvSpPr>
+          <p:cNvPr id="16" name="TextBox 15"/>
+          <p:cNvSpPr txBox="1"/>
+          <p:nvPr/>
+        </p:nvSpPr>
+        <p:spPr>
+          <a:xfrm>
+            <a:off x="1965960" y="6894576"/>
+            <a:ext cx="21945600" cy="777240"/>
           </a:xfrm>
           <a:prstGeom prst="rect">
             <a:avLst/>
@@ -3374,84 +3720,29 @@
               </a:spcAft>
             </a:pPr>
             <a:r>
-              <a:rPr sz="3800" b="1">
-                <a:solidFill>
-                  <a:srgbClr val="F5B020"/>
+              <a:rPr sz="4200" b="1">
+                <a:solidFill>
+                  <a:srgbClr val="1E3A8A"/>
                 </a:solidFill>
                 <a:latin typeface="Microsoft JhengHei"/>
                 <a:ea typeface="Microsoft JhengHei"/>
                 <a:cs typeface="Microsoft JhengHei"/>
               </a:rPr>
-              <a:t>01 </a:t>
-            </a:r>
-            <a:r>
-              <a:rPr sz="3800" b="1">
-                <a:solidFill>
-                  <a:srgbClr val="1E3A8A"/>
-                </a:solidFill>
-                <a:latin typeface="Microsoft JhengHei"/>
-                <a:ea typeface="Microsoft JhengHei"/>
-                <a:cs typeface="Microsoft JhengHei"/>
-              </a:rPr>
-              <a:t>· 為什麼需要它 — 案件量在漲，答辯時間沒有變多</a:t>
-            </a:r>
-          </a:p>
-        </p:txBody>
-      </p:sp>
-      <p:sp>
-        <p:nvSpPr>
-          <p:cNvPr id="9" name="Rectangle 8"/>
+              <a:t>案件量在漲，答辯時間沒有變多</a:t>
+            </a:r>
+          </a:p>
+        </p:txBody>
+      </p:sp>
+      <p:sp>
+        <p:nvSpPr>
+          <p:cNvPr id="17" name="Rectangle 16"/>
           <p:cNvSpPr/>
           <p:nvPr/>
         </p:nvSpPr>
         <p:spPr>
           <a:xfrm>
-            <a:off x="1097280" y="6720840"/>
-            <a:ext cx="6190488" cy="2286000"/>
-          </a:xfrm>
-          <a:prstGeom prst="rect">
-            <a:avLst/>
-          </a:prstGeom>
-          <a:solidFill>
-            <a:srgbClr val="F5F7FC"/>
-          </a:solidFill>
-          <a:ln>
-            <a:noFill/>
-          </a:ln>
-          <a:effectLst/>
-        </p:spPr>
-        <p:style>
-          <a:lnRef idx="1">
-            <a:schemeClr val="accent1"/>
-          </a:lnRef>
-          <a:fillRef idx="3">
-            <a:schemeClr val="accent1"/>
-          </a:fillRef>
-          <a:effectRef idx="2">
-            <a:schemeClr val="accent1"/>
-          </a:effectRef>
-          <a:fontRef idx="minor">
-            <a:schemeClr val="lt1"/>
-          </a:fontRef>
-        </p:style>
-        <p:txBody>
-          <a:bodyPr rtlCol="0" anchor="ctr"/>
-          <a:lstStyle/>
-          <a:p>
-            <a:pPr algn="ctr"/>
-          </a:p>
-        </p:txBody>
-      </p:sp>
-      <p:sp>
-        <p:nvSpPr>
-          <p:cNvPr id="10" name="Rectangle 9"/>
-          <p:cNvSpPr/>
-          <p:nvPr/>
-        </p:nvSpPr>
-        <p:spPr>
-          <a:xfrm>
-            <a:off x="1097280" y="6720840"/>
-            <a:ext cx="128016" cy="2286000"/>
+            <a:off x="1993391" y="7735823"/>
+            <a:ext cx="1554480" cy="68580"/>
           </a:xfrm>
           <a:prstGeom prst="rect">
             <a:avLst/>
@@ -3488,14 +3779,58 @@
       </p:sp>
       <p:sp>
         <p:nvSpPr>
-          <p:cNvPr id="11" name="TextBox 10"/>
+          <p:cNvPr id="18" name="Rectangle 17"/>
+          <p:cNvSpPr/>
+          <p:nvPr/>
+        </p:nvSpPr>
+        <p:spPr>
+          <a:xfrm>
+            <a:off x="1133856" y="7973568"/>
+            <a:ext cx="274320" cy="109728"/>
+          </a:xfrm>
+          <a:prstGeom prst="rect">
+            <a:avLst/>
+          </a:prstGeom>
+          <a:solidFill>
+            <a:srgbClr val="F5B020"/>
+          </a:solidFill>
+          <a:ln>
+            <a:noFill/>
+          </a:ln>
+          <a:effectLst/>
+        </p:spPr>
+        <p:style>
+          <a:lnRef idx="1">
+            <a:schemeClr val="accent1"/>
+          </a:lnRef>
+          <a:fillRef idx="3">
+            <a:schemeClr val="accent1"/>
+          </a:fillRef>
+          <a:effectRef idx="2">
+            <a:schemeClr val="accent1"/>
+          </a:effectRef>
+          <a:fontRef idx="minor">
+            <a:schemeClr val="lt1"/>
+          </a:fontRef>
+        </p:style>
+        <p:txBody>
+          <a:bodyPr rtlCol="0" anchor="ctr"/>
+          <a:lstStyle/>
+          <a:p>
+            <a:pPr algn="ctr"/>
+          </a:p>
+        </p:txBody>
+      </p:sp>
+      <p:sp>
+        <p:nvSpPr>
+          <p:cNvPr id="19" name="TextBox 18"/>
           <p:cNvSpPr txBox="1"/>
           <p:nvPr/>
         </p:nvSpPr>
         <p:spPr>
           <a:xfrm>
-            <a:off x="1554480" y="7040880"/>
-            <a:ext cx="5458968" cy="1097280"/>
+            <a:off x="1097280" y="8211312"/>
+            <a:ext cx="6076188" cy="1143000"/>
           </a:xfrm>
           <a:prstGeom prst="rect">
             <a:avLst/>
@@ -3517,7 +3852,7 @@
               </a:spcAft>
             </a:pPr>
             <a:r>
-              <a:rPr sz="6000" b="1">
+              <a:rPr sz="7200" b="1">
                 <a:solidFill>
                   <a:srgbClr val="1E3A8A"/>
                 </a:solidFill>
@@ -3528,7 +3863,7 @@
               <a:t>71,965</a:t>
             </a:r>
             <a:r>
-              <a:rPr sz="2800" b="1">
+              <a:rPr sz="2600" b="1">
                 <a:solidFill>
                   <a:srgbClr val="F5B020"/>
                 </a:solidFill>
@@ -3543,14 +3878,14 @@
       </p:sp>
       <p:sp>
         <p:nvSpPr>
-          <p:cNvPr id="12" name="TextBox 11"/>
+          <p:cNvPr id="20" name="TextBox 19"/>
           <p:cNvSpPr txBox="1"/>
           <p:nvPr/>
         </p:nvSpPr>
         <p:spPr>
           <a:xfrm>
-            <a:off x="1554480" y="8229600"/>
-            <a:ext cx="5458968" cy="640080"/>
+            <a:off x="1133856" y="9372600"/>
+            <a:ext cx="5984748" cy="548640"/>
           </a:xfrm>
           <a:prstGeom prst="rect">
             <a:avLst/>
@@ -3572,7 +3907,7 @@
               </a:spcAft>
             </a:pPr>
             <a:r>
-              <a:rPr sz="2400" b="0">
+              <a:rPr sz="2300" b="0">
                 <a:solidFill>
                   <a:srgbClr val="5A6B8C"/>
                 </a:solidFill>
@@ -3587,58 +3922,14 @@
       </p:sp>
       <p:sp>
         <p:nvSpPr>
-          <p:cNvPr id="13" name="Rectangle 12"/>
+          <p:cNvPr id="21" name="Rectangle 20"/>
           <p:cNvSpPr/>
           <p:nvPr/>
         </p:nvSpPr>
         <p:spPr>
           <a:xfrm>
-            <a:off x="7744968" y="6720840"/>
-            <a:ext cx="6190488" cy="2286000"/>
-          </a:xfrm>
-          <a:prstGeom prst="rect">
-            <a:avLst/>
-          </a:prstGeom>
-          <a:solidFill>
-            <a:srgbClr val="F5F7FC"/>
-          </a:solidFill>
-          <a:ln>
-            <a:noFill/>
-          </a:ln>
-          <a:effectLst/>
-        </p:spPr>
-        <p:style>
-          <a:lnRef idx="1">
-            <a:schemeClr val="accent1"/>
-          </a:lnRef>
-          <a:fillRef idx="3">
-            <a:schemeClr val="accent1"/>
-          </a:fillRef>
-          <a:effectRef idx="2">
-            <a:schemeClr val="accent1"/>
-          </a:effectRef>
-          <a:fontRef idx="minor">
-            <a:schemeClr val="lt1"/>
-          </a:fontRef>
-        </p:style>
-        <p:txBody>
-          <a:bodyPr rtlCol="0" anchor="ctr"/>
-          <a:lstStyle/>
-          <a:p>
-            <a:pPr algn="ctr"/>
-          </a:p>
-        </p:txBody>
-      </p:sp>
-      <p:sp>
-        <p:nvSpPr>
-          <p:cNvPr id="14" name="Rectangle 13"/>
-          <p:cNvSpPr/>
-          <p:nvPr/>
-        </p:nvSpPr>
-        <p:spPr>
-          <a:xfrm>
-            <a:off x="7744968" y="6720840"/>
-            <a:ext cx="128016" cy="2286000"/>
+            <a:off x="7758683" y="7973568"/>
+            <a:ext cx="274320" cy="109728"/>
           </a:xfrm>
           <a:prstGeom prst="rect">
             <a:avLst/>
@@ -3675,14 +3966,14 @@
       </p:sp>
       <p:sp>
         <p:nvSpPr>
-          <p:cNvPr id="15" name="TextBox 14"/>
+          <p:cNvPr id="22" name="TextBox 21"/>
           <p:cNvSpPr txBox="1"/>
           <p:nvPr/>
         </p:nvSpPr>
         <p:spPr>
           <a:xfrm>
-            <a:off x="8202168" y="7040880"/>
-            <a:ext cx="5458968" cy="1097280"/>
+            <a:off x="7722108" y="8211312"/>
+            <a:ext cx="6076188" cy="1143000"/>
           </a:xfrm>
           <a:prstGeom prst="rect">
             <a:avLst/>
@@ -3704,7 +3995,7 @@
               </a:spcAft>
             </a:pPr>
             <a:r>
-              <a:rPr sz="6000" b="1">
+              <a:rPr sz="7200" b="1">
                 <a:solidFill>
                   <a:srgbClr val="1E3A8A"/>
                 </a:solidFill>
@@ -3715,7 +4006,7 @@
               <a:t>8 個月</a:t>
             </a:r>
             <a:r>
-              <a:rPr sz="2800" b="1">
+              <a:rPr sz="2600" b="1">
                 <a:solidFill>
                   <a:srgbClr val="F5B020"/>
                 </a:solidFill>
@@ -3730,14 +4021,14 @@
       </p:sp>
       <p:sp>
         <p:nvSpPr>
-          <p:cNvPr id="16" name="TextBox 15"/>
+          <p:cNvPr id="23" name="TextBox 22"/>
           <p:cNvSpPr txBox="1"/>
           <p:nvPr/>
         </p:nvSpPr>
         <p:spPr>
           <a:xfrm>
-            <a:off x="8202168" y="8229600"/>
-            <a:ext cx="5458968" cy="640080"/>
+            <a:off x="7758683" y="9372600"/>
+            <a:ext cx="5984748" cy="548640"/>
           </a:xfrm>
           <a:prstGeom prst="rect">
             <a:avLst/>
@@ -3759,7 +4050,7 @@
               </a:spcAft>
             </a:pPr>
             <a:r>
-              <a:rPr sz="2400" b="0">
+              <a:rPr sz="2300" b="0">
                 <a:solidFill>
                   <a:srgbClr val="5A6B8C"/>
                 </a:solidFill>
@@ -3774,20 +4065,20 @@
       </p:sp>
       <p:sp>
         <p:nvSpPr>
-          <p:cNvPr id="17" name="Rectangle 16"/>
+          <p:cNvPr id="24" name="Rectangle 23"/>
           <p:cNvSpPr/>
           <p:nvPr/>
         </p:nvSpPr>
         <p:spPr>
           <a:xfrm>
-            <a:off x="14392656" y="6720840"/>
-            <a:ext cx="6190488" cy="2286000"/>
+            <a:off x="7520940" y="8046720"/>
+            <a:ext cx="20116" cy="1874519"/>
           </a:xfrm>
           <a:prstGeom prst="rect">
             <a:avLst/>
           </a:prstGeom>
           <a:solidFill>
-            <a:srgbClr val="F5F7FC"/>
+            <a:srgbClr val="D7DDEA"/>
           </a:solidFill>
           <a:ln>
             <a:noFill/>
@@ -3818,14 +4109,14 @@
       </p:sp>
       <p:sp>
         <p:nvSpPr>
-          <p:cNvPr id="18" name="Rectangle 17"/>
+          <p:cNvPr id="25" name="Rectangle 24"/>
           <p:cNvSpPr/>
           <p:nvPr/>
         </p:nvSpPr>
         <p:spPr>
           <a:xfrm>
-            <a:off x="14392656" y="6720840"/>
-            <a:ext cx="128016" cy="2286000"/>
+            <a:off x="14383512" y="7973568"/>
+            <a:ext cx="274320" cy="109728"/>
           </a:xfrm>
           <a:prstGeom prst="rect">
             <a:avLst/>
@@ -3862,14 +4153,14 @@
       </p:sp>
       <p:sp>
         <p:nvSpPr>
-          <p:cNvPr id="19" name="TextBox 18"/>
+          <p:cNvPr id="26" name="TextBox 25"/>
           <p:cNvSpPr txBox="1"/>
           <p:nvPr/>
         </p:nvSpPr>
         <p:spPr>
           <a:xfrm>
-            <a:off x="14849856" y="7040880"/>
-            <a:ext cx="5458968" cy="1097280"/>
+            <a:off x="14346936" y="8211312"/>
+            <a:ext cx="6076188" cy="1143000"/>
           </a:xfrm>
           <a:prstGeom prst="rect">
             <a:avLst/>
@@ -3891,7 +4182,7 @@
               </a:spcAft>
             </a:pPr>
             <a:r>
-              <a:rPr sz="6000" b="1">
+              <a:rPr sz="7200" b="1">
                 <a:solidFill>
                   <a:srgbClr val="1E3A8A"/>
                 </a:solidFill>
@@ -3902,7 +4193,7 @@
               <a:t>2 個月</a:t>
             </a:r>
             <a:r>
-              <a:rPr sz="2800" b="1">
+              <a:rPr sz="2600" b="1">
                 <a:solidFill>
                   <a:srgbClr val="F5B020"/>
                 </a:solidFill>
@@ -3917,14 +4208,14 @@
       </p:sp>
       <p:sp>
         <p:nvSpPr>
-          <p:cNvPr id="20" name="TextBox 19"/>
+          <p:cNvPr id="27" name="TextBox 26"/>
           <p:cNvSpPr txBox="1"/>
           <p:nvPr/>
         </p:nvSpPr>
         <p:spPr>
           <a:xfrm>
-            <a:off x="14849856" y="8229600"/>
-            <a:ext cx="5458968" cy="640080"/>
+            <a:off x="14383512" y="9372600"/>
+            <a:ext cx="5984748" cy="548640"/>
           </a:xfrm>
           <a:prstGeom prst="rect">
             <a:avLst/>
@@ -3946,7 +4237,7 @@
               </a:spcAft>
             </a:pPr>
             <a:r>
-              <a:rPr sz="2400" b="0">
+              <a:rPr sz="2300" b="0">
                 <a:solidFill>
                   <a:srgbClr val="5A6B8C"/>
                 </a:solidFill>
@@ -3961,20 +4252,20 @@
       </p:sp>
       <p:sp>
         <p:nvSpPr>
-          <p:cNvPr id="21" name="Rectangle 20"/>
+          <p:cNvPr id="28" name="Rectangle 27"/>
           <p:cNvSpPr/>
           <p:nvPr/>
         </p:nvSpPr>
         <p:spPr>
           <a:xfrm>
-            <a:off x="21040344" y="6720840"/>
-            <a:ext cx="6190488" cy="2286000"/>
+            <a:off x="14145768" y="8046720"/>
+            <a:ext cx="20116" cy="1874519"/>
           </a:xfrm>
           <a:prstGeom prst="rect">
             <a:avLst/>
           </a:prstGeom>
           <a:solidFill>
-            <a:srgbClr val="F5F7FC"/>
+            <a:srgbClr val="D7DDEA"/>
           </a:solidFill>
           <a:ln>
             <a:noFill/>
@@ -4005,14 +4296,14 @@
       </p:sp>
       <p:sp>
         <p:nvSpPr>
-          <p:cNvPr id="22" name="Rectangle 21"/>
+          <p:cNvPr id="29" name="Rectangle 28"/>
           <p:cNvSpPr/>
           <p:nvPr/>
         </p:nvSpPr>
         <p:spPr>
           <a:xfrm>
-            <a:off x="21040344" y="6720840"/>
-            <a:ext cx="128016" cy="2286000"/>
+            <a:off x="21008340" y="7973568"/>
+            <a:ext cx="274320" cy="109728"/>
           </a:xfrm>
           <a:prstGeom prst="rect">
             <a:avLst/>
@@ -4049,14 +4340,14 @@
       </p:sp>
       <p:sp>
         <p:nvSpPr>
-          <p:cNvPr id="23" name="TextBox 22"/>
+          <p:cNvPr id="30" name="TextBox 29"/>
           <p:cNvSpPr txBox="1"/>
           <p:nvPr/>
         </p:nvSpPr>
         <p:spPr>
           <a:xfrm>
-            <a:off x="21497544" y="7040880"/>
-            <a:ext cx="5458968" cy="1097280"/>
+            <a:off x="20971764" y="8211312"/>
+            <a:ext cx="6076188" cy="1143000"/>
           </a:xfrm>
           <a:prstGeom prst="rect">
             <a:avLst/>
@@ -4078,7 +4369,7 @@
               </a:spcAft>
             </a:pPr>
             <a:r>
-              <a:rPr sz="6000" b="1">
+              <a:rPr sz="7200" b="1">
                 <a:solidFill>
                   <a:srgbClr val="1E3A8A"/>
                 </a:solidFill>
@@ -4089,7 +4380,7 @@
               <a:t>4–8 小時</a:t>
             </a:r>
             <a:r>
-              <a:rPr sz="2800" b="1">
+              <a:rPr sz="2600" b="1">
                 <a:solidFill>
                   <a:srgbClr val="F5B020"/>
                 </a:solidFill>
@@ -4104,14 +4395,14 @@
       </p:sp>
       <p:sp>
         <p:nvSpPr>
-          <p:cNvPr id="24" name="TextBox 23"/>
+          <p:cNvPr id="31" name="TextBox 30"/>
           <p:cNvSpPr txBox="1"/>
           <p:nvPr/>
         </p:nvSpPr>
         <p:spPr>
           <a:xfrm>
-            <a:off x="21497544" y="8229600"/>
-            <a:ext cx="5458968" cy="640080"/>
+            <a:off x="21008340" y="9372600"/>
+            <a:ext cx="5984748" cy="548640"/>
           </a:xfrm>
           <a:prstGeom prst="rect">
             <a:avLst/>
@@ -4133,7 +4424,7 @@
               </a:spcAft>
             </a:pPr>
             <a:r>
-              <a:rPr sz="2400" b="0">
+              <a:rPr sz="2300" b="0">
                 <a:solidFill>
                   <a:srgbClr val="5A6B8C"/>
                 </a:solidFill>
@@ -4148,20 +4439,20 @@
       </p:sp>
       <p:sp>
         <p:nvSpPr>
-          <p:cNvPr id="25" name="Rectangle 24"/>
+          <p:cNvPr id="32" name="Rectangle 31"/>
           <p:cNvSpPr/>
           <p:nvPr/>
         </p:nvSpPr>
         <p:spPr>
           <a:xfrm>
-            <a:off x="1097280" y="9345167"/>
-            <a:ext cx="384048" cy="384048"/>
+            <a:off x="20770596" y="8046720"/>
+            <a:ext cx="20116" cy="1874519"/>
           </a:xfrm>
           <a:prstGeom prst="rect">
             <a:avLst/>
           </a:prstGeom>
           <a:solidFill>
-            <a:srgbClr val="F5B020"/>
+            <a:srgbClr val="D7DDEA"/>
           </a:solidFill>
           <a:ln>
             <a:noFill/>
@@ -4192,14 +4483,14 @@
       </p:sp>
       <p:sp>
         <p:nvSpPr>
-          <p:cNvPr id="26" name="TextBox 25"/>
+          <p:cNvPr id="33" name="TextBox 32"/>
           <p:cNvSpPr txBox="1"/>
           <p:nvPr/>
         </p:nvSpPr>
         <p:spPr>
           <a:xfrm>
-            <a:off x="1737360" y="9235440"/>
-            <a:ext cx="12801600" cy="914400"/>
+            <a:off x="1097280" y="10104120"/>
+            <a:ext cx="26133552" cy="548640"/>
           </a:xfrm>
           <a:prstGeom prst="rect">
             <a:avLst/>
@@ -4221,72 +4512,98 @@
               </a:spcAft>
             </a:pPr>
             <a:r>
-              <a:rPr sz="3800" b="1">
-                <a:solidFill>
-                  <a:srgbClr val="F5B020"/>
+              <a:rPr sz="2400" b="1">
+                <a:solidFill>
+                  <a:srgbClr val="1E3A8A"/>
                 </a:solidFill>
                 <a:latin typeface="Microsoft JhengHei"/>
                 <a:ea typeface="Microsoft JhengHei"/>
                 <a:cs typeface="Microsoft JhengHei"/>
               </a:rPr>
-              <a:t>02 </a:t>
-            </a:r>
-            <a:r>
-              <a:rPr sz="3800" b="1">
-                <a:solidFill>
-                  <a:srgbClr val="1E3A8A"/>
+              <a:t>為什麼不直接貼 ChatGPT？　</a:t>
+            </a:r>
+            <a:r>
+              <a:rPr sz="2300" b="0">
+                <a:solidFill>
+                  <a:srgbClr val="5A6B8C"/>
                 </a:solidFill>
                 <a:latin typeface="Microsoft JhengHei"/>
                 <a:ea typeface="Microsoft JhengHei"/>
                 <a:cs typeface="Microsoft JhengHei"/>
               </a:rPr>
-              <a:t>· 功能模組架構 — 一條安全管線</a:t>
-            </a:r>
-          </a:p>
-        </p:txBody>
-      </p:sp>
-      <p:pic>
-        <p:nvPicPr>
-          <p:cNvPr id="27" name="Picture 26" descr="architecture.png"/>
-          <p:cNvPicPr>
-            <a:picLocks noChangeAspect="1"/>
-          </p:cNvPicPr>
-          <p:nvPr/>
-        </p:nvPicPr>
-        <p:blipFill>
-          <a:blip r:embed="rId3"/>
-          <a:stretch>
-            <a:fillRect/>
-          </a:stretch>
-        </p:blipFill>
-        <p:spPr>
-          <a:xfrm>
-            <a:off x="5020056" y="10195560"/>
-            <a:ext cx="18288000" cy="6172200"/>
+              <a:t>機密外洩 · 捏造引用 · 無稽核紀錄 · 期限算錯不可復原 — 所以需要一座有護欄的系統。</a:t>
+            </a:r>
+          </a:p>
+        </p:txBody>
+      </p:sp>
+      <p:sp>
+        <p:nvSpPr>
+          <p:cNvPr id="34" name="Oval 33"/>
+          <p:cNvSpPr/>
+          <p:nvPr/>
+        </p:nvSpPr>
+        <p:spPr>
+          <a:xfrm>
+            <a:off x="1097280" y="10698480"/>
+            <a:ext cx="603504" cy="603504"/>
+          </a:xfrm>
+          <a:prstGeom prst="ellipse">
+            <a:avLst/>
+          </a:prstGeom>
+          <a:solidFill>
+            <a:srgbClr val="F5B020"/>
+          </a:solidFill>
+          <a:ln>
+            <a:noFill/>
+          </a:ln>
+          <a:effectLst>
+            <a:outerShdw blurRad="110000" dist="42000" dir="5400000" rotWithShape="0">
+              <a:srgbClr val="1A2236">
+                <a:alpha val="24000"/>
+              </a:srgbClr>
+            </a:outerShdw>
+          </a:effectLst>
+        </p:spPr>
+        <p:style>
+          <a:lnRef idx="1">
+            <a:schemeClr val="accent1"/>
+          </a:lnRef>
+          <a:fillRef idx="3">
+            <a:schemeClr val="accent1"/>
+          </a:fillRef>
+          <a:effectRef idx="2">
+            <a:schemeClr val="accent1"/>
+          </a:effectRef>
+          <a:fontRef idx="minor">
+            <a:schemeClr val="lt1"/>
+          </a:fontRef>
+        </p:style>
+        <p:txBody>
+          <a:bodyPr rtlCol="0" anchor="ctr"/>
+          <a:lstStyle/>
+          <a:p>
+            <a:pPr algn="ctr"/>
+          </a:p>
+        </p:txBody>
+      </p:sp>
+      <p:sp>
+        <p:nvSpPr>
+          <p:cNvPr id="35" name="TextBox 34"/>
+          <p:cNvSpPr txBox="1"/>
+          <p:nvPr/>
+        </p:nvSpPr>
+        <p:spPr>
+          <a:xfrm>
+            <a:off x="1097280" y="10716767"/>
+            <a:ext cx="603504" cy="566928"/>
           </a:xfrm>
           <a:prstGeom prst="rect">
             <a:avLst/>
           </a:prstGeom>
-        </p:spPr>
-      </p:pic>
-      <p:sp>
-        <p:nvSpPr>
-          <p:cNvPr id="28" name="TextBox 27"/>
-          <p:cNvSpPr txBox="1"/>
-          <p:nvPr/>
-        </p:nvSpPr>
-        <p:spPr>
-          <a:xfrm>
-            <a:off x="1097280" y="16568927"/>
-            <a:ext cx="26133552" cy="640080"/>
-          </a:xfrm>
-          <a:prstGeom prst="rect">
-            <a:avLst/>
-          </a:prstGeom>
           <a:noFill/>
         </p:spPr>
         <p:txBody>
-          <a:bodyPr wrap="square" anchor="t" lIns="0" rIns="0" tIns="0" bIns="0">
+          <a:bodyPr wrap="square" anchor="ctr" lIns="0" rIns="0" tIns="0" bIns="0">
             <a:spAutoFit/>
           </a:bodyPr>
           <a:lstStyle/>
@@ -4300,84 +4617,29 @@
               </a:spcAft>
             </a:pPr>
             <a:r>
-              <a:rPr sz="2600" b="1">
-                <a:solidFill>
-                  <a:srgbClr val="F5B020"/>
+              <a:rPr sz="2700" b="1">
+                <a:solidFill>
+                  <a:srgbClr val="FFFFFF"/>
                 </a:solidFill>
                 <a:latin typeface="Microsoft JhengHei"/>
                 <a:ea typeface="Microsoft JhengHei"/>
                 <a:cs typeface="Microsoft JhengHei"/>
               </a:rPr>
-              <a:t>兩條鐵則　</a:t>
-            </a:r>
-            <a:r>
-              <a:rPr sz="2500" b="0">
-                <a:solidFill>
-                  <a:srgbClr val="5A6B8C"/>
-                </a:solidFill>
-                <a:latin typeface="Microsoft JhengHei"/>
-                <a:ea typeface="Microsoft JhengHei"/>
-                <a:cs typeface="Microsoft JhengHei"/>
-              </a:rPr>
-              <a:t>閘道永不直接呼叫模型；推論引擎不保存任何業務資料。</a:t>
-            </a:r>
-          </a:p>
-        </p:txBody>
-      </p:sp>
-      <p:sp>
-        <p:nvSpPr>
-          <p:cNvPr id="29" name="Rectangle 28"/>
-          <p:cNvSpPr/>
-          <p:nvPr/>
-        </p:nvSpPr>
-        <p:spPr>
-          <a:xfrm>
-            <a:off x="1097280" y="17529048"/>
-            <a:ext cx="384048" cy="384048"/>
-          </a:xfrm>
-          <a:prstGeom prst="rect">
-            <a:avLst/>
-          </a:prstGeom>
-          <a:solidFill>
-            <a:srgbClr val="F5B020"/>
-          </a:solidFill>
-          <a:ln>
-            <a:noFill/>
-          </a:ln>
-          <a:effectLst/>
-        </p:spPr>
-        <p:style>
-          <a:lnRef idx="1">
-            <a:schemeClr val="accent1"/>
-          </a:lnRef>
-          <a:fillRef idx="3">
-            <a:schemeClr val="accent1"/>
-          </a:fillRef>
-          <a:effectRef idx="2">
-            <a:schemeClr val="accent1"/>
-          </a:effectRef>
-          <a:fontRef idx="minor">
-            <a:schemeClr val="lt1"/>
-          </a:fontRef>
-        </p:style>
-        <p:txBody>
-          <a:bodyPr rtlCol="0" anchor="ctr"/>
-          <a:lstStyle/>
-          <a:p>
-            <a:pPr algn="ctr"/>
-          </a:p>
-        </p:txBody>
-      </p:sp>
-      <p:sp>
-        <p:nvSpPr>
-          <p:cNvPr id="30" name="TextBox 29"/>
+              <a:t>02</a:t>
+            </a:r>
+          </a:p>
+        </p:txBody>
+      </p:sp>
+      <p:sp>
+        <p:nvSpPr>
+          <p:cNvPr id="36" name="TextBox 35"/>
           <p:cNvSpPr txBox="1"/>
           <p:nvPr/>
         </p:nvSpPr>
         <p:spPr>
           <a:xfrm>
-            <a:off x="1737360" y="17419320"/>
-            <a:ext cx="12801600" cy="914400"/>
+            <a:off x="1965960" y="10643615"/>
+            <a:ext cx="21945600" cy="777240"/>
           </a:xfrm>
           <a:prstGeom prst="rect">
             <a:avLst/>
@@ -4399,33 +4661,118 @@
               </a:spcAft>
             </a:pPr>
             <a:r>
-              <a:rPr sz="3800" b="1">
-                <a:solidFill>
-                  <a:srgbClr val="F5B020"/>
+              <a:rPr sz="4200" b="1">
+                <a:solidFill>
+                  <a:srgbClr val="1E3A8A"/>
                 </a:solidFill>
                 <a:latin typeface="Microsoft JhengHei"/>
                 <a:ea typeface="Microsoft JhengHei"/>
                 <a:cs typeface="Microsoft JhengHei"/>
               </a:rPr>
-              <a:t>03 </a:t>
-            </a:r>
-            <a:r>
-              <a:rPr sz="3800" b="1">
-                <a:solidFill>
-                  <a:srgbClr val="1E3A8A"/>
-                </a:solidFill>
-                <a:latin typeface="Microsoft JhengHei"/>
-                <a:ea typeface="Microsoft JhengHei"/>
-                <a:cs typeface="Microsoft JhengHei"/>
-              </a:rPr>
-              <a:t>· 操作流程 × 資料流</a:t>
-            </a:r>
+              <a:t>功能模組架構 — 一條安全管線</a:t>
+            </a:r>
+          </a:p>
+        </p:txBody>
+      </p:sp>
+      <p:sp>
+        <p:nvSpPr>
+          <p:cNvPr id="37" name="Rectangle 36"/>
+          <p:cNvSpPr/>
+          <p:nvPr/>
+        </p:nvSpPr>
+        <p:spPr>
+          <a:xfrm>
+            <a:off x="1993391" y="11484863"/>
+            <a:ext cx="1554480" cy="68580"/>
+          </a:xfrm>
+          <a:prstGeom prst="rect">
+            <a:avLst/>
+          </a:prstGeom>
+          <a:solidFill>
+            <a:srgbClr val="F5B020"/>
+          </a:solidFill>
+          <a:ln>
+            <a:noFill/>
+          </a:ln>
+          <a:effectLst/>
+        </p:spPr>
+        <p:style>
+          <a:lnRef idx="1">
+            <a:schemeClr val="accent1"/>
+          </a:lnRef>
+          <a:fillRef idx="3">
+            <a:schemeClr val="accent1"/>
+          </a:fillRef>
+          <a:effectRef idx="2">
+            <a:schemeClr val="accent1"/>
+          </a:effectRef>
+          <a:fontRef idx="minor">
+            <a:schemeClr val="lt1"/>
+          </a:fontRef>
+        </p:style>
+        <p:txBody>
+          <a:bodyPr rtlCol="0" anchor="ctr"/>
+          <a:lstStyle/>
+          <a:p>
+            <a:pPr algn="ctr"/>
+          </a:p>
+        </p:txBody>
+      </p:sp>
+      <p:sp>
+        <p:nvSpPr>
+          <p:cNvPr id="38" name="Rounded Rectangle 37"/>
+          <p:cNvSpPr/>
+          <p:nvPr/>
+        </p:nvSpPr>
+        <p:spPr>
+          <a:xfrm>
+            <a:off x="914400" y="11475720"/>
+            <a:ext cx="26499312" cy="6543675"/>
+          </a:xfrm>
+          <a:prstGeom prst="roundRect">
+            <a:avLst>
+              <a:gd name="adj" fmla="val 4500"/>
+            </a:avLst>
+          </a:prstGeom>
+          <a:solidFill>
+            <a:srgbClr val="FFFFFF"/>
+          </a:solidFill>
+          <a:ln>
+            <a:noFill/>
+          </a:ln>
+          <a:effectLst>
+            <a:outerShdw blurRad="110000" dist="42000" dir="5400000" rotWithShape="0">
+              <a:srgbClr val="1A2236">
+                <a:alpha val="24000"/>
+              </a:srgbClr>
+            </a:outerShdw>
+          </a:effectLst>
+        </p:spPr>
+        <p:style>
+          <a:lnRef idx="1">
+            <a:schemeClr val="accent1"/>
+          </a:lnRef>
+          <a:fillRef idx="3">
+            <a:schemeClr val="accent1"/>
+          </a:fillRef>
+          <a:effectRef idx="2">
+            <a:schemeClr val="accent1"/>
+          </a:effectRef>
+          <a:fontRef idx="minor">
+            <a:schemeClr val="lt1"/>
+          </a:fontRef>
+        </p:style>
+        <p:txBody>
+          <a:bodyPr rtlCol="0" anchor="ctr"/>
+          <a:lstStyle/>
+          <a:p>
+            <a:pPr algn="ctr"/>
           </a:p>
         </p:txBody>
       </p:sp>
       <p:pic>
         <p:nvPicPr>
-          <p:cNvPr id="31" name="Picture 30" descr="flow_user.png"/>
+          <p:cNvPr id="39" name="Picture 38" descr="_tmp_plain_architecture.png"/>
           <p:cNvPicPr>
             <a:picLocks noChangeAspect="1"/>
           </p:cNvPicPr>
@@ -4439,50 +4786,82 @@
         </p:blipFill>
         <p:spPr>
           <a:xfrm>
-            <a:off x="1956816" y="18379440"/>
-            <a:ext cx="11887200" cy="5691752"/>
+            <a:off x="4562856" y="11887200"/>
+            <a:ext cx="19202400" cy="5400675"/>
           </a:xfrm>
           <a:prstGeom prst="rect">
             <a:avLst/>
           </a:prstGeom>
+          <a:effectLst/>
         </p:spPr>
       </p:pic>
-      <p:pic>
-        <p:nvPicPr>
-          <p:cNvPr id="32" name="Picture 31" descr="flow_data.png"/>
-          <p:cNvPicPr>
-            <a:picLocks noChangeAspect="1"/>
-          </p:cNvPicPr>
-          <p:nvPr/>
-        </p:nvPicPr>
-        <p:blipFill>
-          <a:blip r:embed="rId5"/>
-          <a:stretch>
-            <a:fillRect/>
-          </a:stretch>
-        </p:blipFill>
-        <p:spPr>
-          <a:xfrm>
-            <a:off x="14484096" y="18379440"/>
-            <a:ext cx="11887200" cy="5691752"/>
+      <p:sp>
+        <p:nvSpPr>
+          <p:cNvPr id="40" name="TextBox 39"/>
+          <p:cNvSpPr txBox="1"/>
+          <p:nvPr/>
+        </p:nvSpPr>
+        <p:spPr>
+          <a:xfrm>
+            <a:off x="914400" y="17425035"/>
+            <a:ext cx="26499312" cy="502920"/>
           </a:xfrm>
           <a:prstGeom prst="rect">
             <a:avLst/>
           </a:prstGeom>
-        </p:spPr>
-      </p:pic>
-      <p:sp>
-        <p:nvSpPr>
-          <p:cNvPr id="33" name="Rectangle 32"/>
+          <a:noFill/>
+        </p:spPr>
+        <p:txBody>
+          <a:bodyPr wrap="square" anchor="t" lIns="0" rIns="0" tIns="0" bIns="0">
+            <a:spAutoFit/>
+          </a:bodyPr>
+          <a:lstStyle/>
+          <a:p>
+            <a:pPr algn="ctr">
+              <a:lnSpc>
+                <a:spcPct val="112000"/>
+              </a:lnSpc>
+              <a:spcAft>
+                <a:spcPts val="0"/>
+              </a:spcAft>
+            </a:pPr>
+            <a:r>
+              <a:rPr sz="2400" b="1">
+                <a:solidFill>
+                  <a:srgbClr val="F5B020"/>
+                </a:solidFill>
+                <a:latin typeface="Microsoft JhengHei"/>
+                <a:ea typeface="Microsoft JhengHei"/>
+                <a:cs typeface="Microsoft JhengHei"/>
+              </a:rPr>
+              <a:t>兩條鐵則　</a:t>
+            </a:r>
+            <a:r>
+              <a:rPr sz="2300" b="0">
+                <a:solidFill>
+                  <a:srgbClr val="5A6B8C"/>
+                </a:solidFill>
+                <a:latin typeface="Microsoft JhengHei"/>
+                <a:ea typeface="Microsoft JhengHei"/>
+                <a:cs typeface="Microsoft JhengHei"/>
+              </a:rPr>
+              <a:t>閘道永不直接呼叫模型；推論引擎不保存任何業務資料。</a:t>
+            </a:r>
+          </a:p>
+        </p:txBody>
+      </p:sp>
+      <p:sp>
+        <p:nvSpPr>
+          <p:cNvPr id="41" name="Oval 40"/>
           <p:cNvSpPr/>
           <p:nvPr/>
         </p:nvSpPr>
         <p:spPr>
           <a:xfrm>
-            <a:off x="1097280" y="24866720"/>
-            <a:ext cx="384048" cy="384048"/>
-          </a:xfrm>
-          <a:prstGeom prst="rect">
+            <a:off x="1097280" y="18385155"/>
+            <a:ext cx="603504" cy="603504"/>
+          </a:xfrm>
+          <a:prstGeom prst="ellipse">
             <a:avLst/>
           </a:prstGeom>
           <a:solidFill>
@@ -4491,7 +4870,13 @@
           <a:ln>
             <a:noFill/>
           </a:ln>
-          <a:effectLst/>
+          <a:effectLst>
+            <a:outerShdw blurRad="110000" dist="42000" dir="5400000" rotWithShape="0">
+              <a:srgbClr val="1A2236">
+                <a:alpha val="24000"/>
+              </a:srgbClr>
+            </a:outerShdw>
+          </a:effectLst>
         </p:spPr>
         <p:style>
           <a:lnRef idx="1">
@@ -4517,14 +4902,58 @@
       </p:sp>
       <p:sp>
         <p:nvSpPr>
-          <p:cNvPr id="34" name="TextBox 33"/>
+          <p:cNvPr id="42" name="TextBox 41"/>
           <p:cNvSpPr txBox="1"/>
           <p:nvPr/>
         </p:nvSpPr>
         <p:spPr>
           <a:xfrm>
-            <a:off x="1737360" y="24756992"/>
-            <a:ext cx="12801600" cy="914400"/>
+            <a:off x="1097280" y="18403443"/>
+            <a:ext cx="603504" cy="566928"/>
+          </a:xfrm>
+          <a:prstGeom prst="rect">
+            <a:avLst/>
+          </a:prstGeom>
+          <a:noFill/>
+        </p:spPr>
+        <p:txBody>
+          <a:bodyPr wrap="square" anchor="ctr" lIns="0" rIns="0" tIns="0" bIns="0">
+            <a:spAutoFit/>
+          </a:bodyPr>
+          <a:lstStyle/>
+          <a:p>
+            <a:pPr algn="ctr">
+              <a:lnSpc>
+                <a:spcPct val="112000"/>
+              </a:lnSpc>
+              <a:spcAft>
+                <a:spcPts val="0"/>
+              </a:spcAft>
+            </a:pPr>
+            <a:r>
+              <a:rPr sz="2700" b="1">
+                <a:solidFill>
+                  <a:srgbClr val="FFFFFF"/>
+                </a:solidFill>
+                <a:latin typeface="Microsoft JhengHei"/>
+                <a:ea typeface="Microsoft JhengHei"/>
+                <a:cs typeface="Microsoft JhengHei"/>
+              </a:rPr>
+              <a:t>03</a:t>
+            </a:r>
+          </a:p>
+        </p:txBody>
+      </p:sp>
+      <p:sp>
+        <p:nvSpPr>
+          <p:cNvPr id="43" name="TextBox 42"/>
+          <p:cNvSpPr txBox="1"/>
+          <p:nvPr/>
+        </p:nvSpPr>
+        <p:spPr>
+          <a:xfrm>
+            <a:off x="1965960" y="18330291"/>
+            <a:ext cx="21945600" cy="777240"/>
           </a:xfrm>
           <a:prstGeom prst="rect">
             <a:avLst/>
@@ -4546,33 +4975,291 @@
               </a:spcAft>
             </a:pPr>
             <a:r>
-              <a:rPr sz="3800" b="1">
-                <a:solidFill>
-                  <a:srgbClr val="F5B020"/>
+              <a:rPr sz="4200" b="1">
+                <a:solidFill>
+                  <a:srgbClr val="1E3A8A"/>
                 </a:solidFill>
                 <a:latin typeface="Microsoft JhengHei"/>
                 <a:ea typeface="Microsoft JhengHei"/>
                 <a:cs typeface="Microsoft JhengHei"/>
               </a:rPr>
-              <a:t>04 </a:t>
-            </a:r>
-            <a:r>
-              <a:rPr sz="3800" b="1">
-                <a:solidFill>
-                  <a:srgbClr val="1E3A8A"/>
+              <a:t>操作流程 × 資料流</a:t>
+            </a:r>
+          </a:p>
+        </p:txBody>
+      </p:sp>
+      <p:sp>
+        <p:nvSpPr>
+          <p:cNvPr id="44" name="Rectangle 43"/>
+          <p:cNvSpPr/>
+          <p:nvPr/>
+        </p:nvSpPr>
+        <p:spPr>
+          <a:xfrm>
+            <a:off x="1993391" y="19171539"/>
+            <a:ext cx="1554480" cy="68580"/>
+          </a:xfrm>
+          <a:prstGeom prst="rect">
+            <a:avLst/>
+          </a:prstGeom>
+          <a:solidFill>
+            <a:srgbClr val="F5B020"/>
+          </a:solidFill>
+          <a:ln>
+            <a:noFill/>
+          </a:ln>
+          <a:effectLst/>
+        </p:spPr>
+        <p:style>
+          <a:lnRef idx="1">
+            <a:schemeClr val="accent1"/>
+          </a:lnRef>
+          <a:fillRef idx="3">
+            <a:schemeClr val="accent1"/>
+          </a:fillRef>
+          <a:effectRef idx="2">
+            <a:schemeClr val="accent1"/>
+          </a:effectRef>
+          <a:fontRef idx="minor">
+            <a:schemeClr val="lt1"/>
+          </a:fontRef>
+        </p:style>
+        <p:txBody>
+          <a:bodyPr rtlCol="0" anchor="ctr"/>
+          <a:lstStyle/>
+          <a:p>
+            <a:pPr algn="ctr"/>
+          </a:p>
+        </p:txBody>
+      </p:sp>
+      <p:sp>
+        <p:nvSpPr>
+          <p:cNvPr id="45" name="Rounded Rectangle 44"/>
+          <p:cNvSpPr/>
+          <p:nvPr/>
+        </p:nvSpPr>
+        <p:spPr>
+          <a:xfrm>
+            <a:off x="914400" y="19345275"/>
+            <a:ext cx="12929616" cy="5282287"/>
+          </a:xfrm>
+          <a:prstGeom prst="roundRect">
+            <a:avLst>
+              <a:gd name="adj" fmla="val 5000"/>
+            </a:avLst>
+          </a:prstGeom>
+          <a:solidFill>
+            <a:srgbClr val="FFFFFF"/>
+          </a:solidFill>
+          <a:ln>
+            <a:noFill/>
+          </a:ln>
+          <a:effectLst>
+            <a:outerShdw blurRad="110000" dist="42000" dir="5400000" rotWithShape="0">
+              <a:srgbClr val="1A2236">
+                <a:alpha val="24000"/>
+              </a:srgbClr>
+            </a:outerShdw>
+          </a:effectLst>
+        </p:spPr>
+        <p:style>
+          <a:lnRef idx="1">
+            <a:schemeClr val="accent1"/>
+          </a:lnRef>
+          <a:fillRef idx="3">
+            <a:schemeClr val="accent1"/>
+          </a:fillRef>
+          <a:effectRef idx="2">
+            <a:schemeClr val="accent1"/>
+          </a:effectRef>
+          <a:fontRef idx="minor">
+            <a:schemeClr val="lt1"/>
+          </a:fontRef>
+        </p:style>
+        <p:txBody>
+          <a:bodyPr rtlCol="0" anchor="ctr"/>
+          <a:lstStyle/>
+          <a:p>
+            <a:pPr algn="ctr"/>
+          </a:p>
+        </p:txBody>
+      </p:sp>
+      <p:pic>
+        <p:nvPicPr>
+          <p:cNvPr id="46" name="Picture 45" descr="_tmp_plain_flow_user.png"/>
+          <p:cNvPicPr>
+            <a:picLocks noChangeAspect="1"/>
+          </p:cNvPicPr>
+          <p:nvPr/>
+        </p:nvPicPr>
+        <p:blipFill>
+          <a:blip r:embed="rId5"/>
+          <a:stretch>
+            <a:fillRect/>
+          </a:stretch>
+        </p:blipFill>
+        <p:spPr>
+          <a:xfrm>
+            <a:off x="2075688" y="19802475"/>
+            <a:ext cx="10607040" cy="4413607"/>
+          </a:xfrm>
+          <a:prstGeom prst="rect">
+            <a:avLst/>
+          </a:prstGeom>
+          <a:effectLst/>
+        </p:spPr>
+      </p:pic>
+      <p:sp>
+        <p:nvSpPr>
+          <p:cNvPr id="47" name="Rounded Rectangle 46"/>
+          <p:cNvSpPr/>
+          <p:nvPr/>
+        </p:nvSpPr>
+        <p:spPr>
+          <a:xfrm>
+            <a:off x="1417320" y="19043523"/>
+            <a:ext cx="6327648" cy="603504"/>
+          </a:xfrm>
+          <a:prstGeom prst="roundRect">
+            <a:avLst>
+              <a:gd name="adj" fmla="val 50000"/>
+            </a:avLst>
+          </a:prstGeom>
+          <a:solidFill>
+            <a:srgbClr val="1E3A8A"/>
+          </a:solidFill>
+          <a:ln>
+            <a:noFill/>
+          </a:ln>
+          <a:effectLst>
+            <a:outerShdw blurRad="110000" dist="42000" dir="5400000" rotWithShape="0">
+              <a:srgbClr val="1A2236">
+                <a:alpha val="24000"/>
+              </a:srgbClr>
+            </a:outerShdw>
+          </a:effectLst>
+        </p:spPr>
+        <p:style>
+          <a:lnRef idx="1">
+            <a:schemeClr val="accent1"/>
+          </a:lnRef>
+          <a:fillRef idx="3">
+            <a:schemeClr val="accent1"/>
+          </a:fillRef>
+          <a:effectRef idx="2">
+            <a:schemeClr val="accent1"/>
+          </a:effectRef>
+          <a:fontRef idx="minor">
+            <a:schemeClr val="lt1"/>
+          </a:fontRef>
+        </p:style>
+        <p:txBody>
+          <a:bodyPr rtlCol="0" anchor="ctr"/>
+          <a:lstStyle/>
+          <a:p>
+            <a:pPr algn="ctr"/>
+          </a:p>
+        </p:txBody>
+      </p:sp>
+      <p:sp>
+        <p:nvSpPr>
+          <p:cNvPr id="48" name="TextBox 47"/>
+          <p:cNvSpPr txBox="1"/>
+          <p:nvPr/>
+        </p:nvSpPr>
+        <p:spPr>
+          <a:xfrm>
+            <a:off x="1417320" y="19043523"/>
+            <a:ext cx="6327648" cy="603504"/>
+          </a:xfrm>
+          <a:prstGeom prst="rect">
+            <a:avLst/>
+          </a:prstGeom>
+          <a:noFill/>
+        </p:spPr>
+        <p:txBody>
+          <a:bodyPr wrap="square" anchor="ctr" lIns="0" rIns="0" tIns="0" bIns="0">
+            <a:spAutoFit/>
+          </a:bodyPr>
+          <a:lstStyle/>
+          <a:p>
+            <a:pPr algn="ctr">
+              <a:lnSpc>
+                <a:spcPct val="112000"/>
+              </a:lnSpc>
+              <a:spcAft>
+                <a:spcPts val="0"/>
+              </a:spcAft>
+            </a:pPr>
+            <a:r>
+              <a:rPr sz="2200" b="1">
+                <a:solidFill>
+                  <a:srgbClr val="FFFFFF"/>
                 </a:solidFill>
                 <a:latin typeface="Microsoft JhengHei"/>
                 <a:ea typeface="Microsoft JhengHei"/>
                 <a:cs typeface="Microsoft JhengHei"/>
               </a:rPr>
-              <a:t>· AI 任務執行流程 × 信任設計</a:t>
-            </a:r>
+              <a:t>操作流程｜使用者只做 4 件事</a:t>
+            </a:r>
+          </a:p>
+        </p:txBody>
+      </p:sp>
+      <p:sp>
+        <p:nvSpPr>
+          <p:cNvPr id="49" name="Rounded Rectangle 48"/>
+          <p:cNvSpPr/>
+          <p:nvPr/>
+        </p:nvSpPr>
+        <p:spPr>
+          <a:xfrm>
+            <a:off x="14484096" y="19345275"/>
+            <a:ext cx="12929616" cy="5282287"/>
+          </a:xfrm>
+          <a:prstGeom prst="roundRect">
+            <a:avLst>
+              <a:gd name="adj" fmla="val 5000"/>
+            </a:avLst>
+          </a:prstGeom>
+          <a:solidFill>
+            <a:srgbClr val="FFFFFF"/>
+          </a:solidFill>
+          <a:ln>
+            <a:noFill/>
+          </a:ln>
+          <a:effectLst>
+            <a:outerShdw blurRad="110000" dist="42000" dir="5400000" rotWithShape="0">
+              <a:srgbClr val="1A2236">
+                <a:alpha val="24000"/>
+              </a:srgbClr>
+            </a:outerShdw>
+          </a:effectLst>
+        </p:spPr>
+        <p:style>
+          <a:lnRef idx="1">
+            <a:schemeClr val="accent1"/>
+          </a:lnRef>
+          <a:fillRef idx="3">
+            <a:schemeClr val="accent1"/>
+          </a:fillRef>
+          <a:effectRef idx="2">
+            <a:schemeClr val="accent1"/>
+          </a:effectRef>
+          <a:fontRef idx="minor">
+            <a:schemeClr val="lt1"/>
+          </a:fontRef>
+        </p:style>
+        <p:txBody>
+          <a:bodyPr rtlCol="0" anchor="ctr"/>
+          <a:lstStyle/>
+          <a:p>
+            <a:pPr algn="ctr"/>
           </a:p>
         </p:txBody>
       </p:sp>
       <p:pic>
         <p:nvPicPr>
-          <p:cNvPr id="35" name="Picture 34" descr="flow_ai.png"/>
+          <p:cNvPr id="50" name="Picture 49" descr="_tmp_plain_flow_data.png"/>
           <p:cNvPicPr>
             <a:picLocks noChangeAspect="1"/>
           </p:cNvPicPr>
@@ -4586,71 +5273,30 @@
         </p:blipFill>
         <p:spPr>
           <a:xfrm>
-            <a:off x="1956816" y="25717112"/>
-            <a:ext cx="11887200" cy="5691752"/>
+            <a:off x="15645384" y="19802475"/>
+            <a:ext cx="10607040" cy="4413607"/>
           </a:xfrm>
           <a:prstGeom prst="rect">
             <a:avLst/>
           </a:prstGeom>
+          <a:effectLst/>
         </p:spPr>
       </p:pic>
       <p:sp>
         <p:nvSpPr>
-          <p:cNvPr id="36" name="Rectangle 35"/>
+          <p:cNvPr id="51" name="Rounded Rectangle 50"/>
           <p:cNvSpPr/>
           <p:nvPr/>
         </p:nvSpPr>
         <p:spPr>
           <a:xfrm>
-            <a:off x="14484096" y="25717112"/>
-            <a:ext cx="11887200" cy="1217198"/>
-          </a:xfrm>
-          <a:prstGeom prst="rect">
-            <a:avLst/>
-          </a:prstGeom>
-          <a:solidFill>
-            <a:srgbClr val="F5F7FC"/>
-          </a:solidFill>
-          <a:ln>
-            <a:noFill/>
-          </a:ln>
-          <a:effectLst/>
-        </p:spPr>
-        <p:style>
-          <a:lnRef idx="1">
-            <a:schemeClr val="accent1"/>
-          </a:lnRef>
-          <a:fillRef idx="3">
-            <a:schemeClr val="accent1"/>
-          </a:fillRef>
-          <a:effectRef idx="2">
-            <a:schemeClr val="accent1"/>
-          </a:effectRef>
-          <a:fontRef idx="minor">
-            <a:schemeClr val="lt1"/>
-          </a:fontRef>
-        </p:style>
-        <p:txBody>
-          <a:bodyPr rtlCol="0" anchor="ctr"/>
-          <a:lstStyle/>
-          <a:p>
-            <a:pPr algn="ctr"/>
-          </a:p>
-        </p:txBody>
-      </p:sp>
-      <p:sp>
-        <p:nvSpPr>
-          <p:cNvPr id="37" name="Rectangle 36"/>
-          <p:cNvSpPr/>
-          <p:nvPr/>
-        </p:nvSpPr>
-        <p:spPr>
-          <a:xfrm>
-            <a:off x="14484096" y="25717112"/>
-            <a:ext cx="128016" cy="1217198"/>
-          </a:xfrm>
-          <a:prstGeom prst="rect">
-            <a:avLst/>
+            <a:off x="14987016" y="19043523"/>
+            <a:ext cx="6711696" cy="603504"/>
+          </a:xfrm>
+          <a:prstGeom prst="roundRect">
+            <a:avLst>
+              <a:gd name="adj" fmla="val 50000"/>
+            </a:avLst>
           </a:prstGeom>
           <a:solidFill>
             <a:srgbClr val="1E3A8A"/>
@@ -4658,7 +5304,13 @@
           <a:ln>
             <a:noFill/>
           </a:ln>
-          <a:effectLst/>
+          <a:effectLst>
+            <a:outerShdw blurRad="110000" dist="42000" dir="5400000" rotWithShape="0">
+              <a:srgbClr val="1A2236">
+                <a:alpha val="24000"/>
+              </a:srgbClr>
+            </a:outerShdw>
+          </a:effectLst>
         </p:spPr>
         <p:style>
           <a:lnRef idx="1">
@@ -4684,14 +5336,152 @@
       </p:sp>
       <p:sp>
         <p:nvSpPr>
-          <p:cNvPr id="38" name="TextBox 37"/>
+          <p:cNvPr id="52" name="TextBox 51"/>
           <p:cNvSpPr txBox="1"/>
           <p:nvPr/>
         </p:nvSpPr>
         <p:spPr>
           <a:xfrm>
-            <a:off x="14987016" y="25854272"/>
-            <a:ext cx="10972800" cy="640080"/>
+            <a:off x="14987016" y="19043523"/>
+            <a:ext cx="6711696" cy="603504"/>
+          </a:xfrm>
+          <a:prstGeom prst="rect">
+            <a:avLst/>
+          </a:prstGeom>
+          <a:noFill/>
+        </p:spPr>
+        <p:txBody>
+          <a:bodyPr wrap="square" anchor="ctr" lIns="0" rIns="0" tIns="0" bIns="0">
+            <a:spAutoFit/>
+          </a:bodyPr>
+          <a:lstStyle/>
+          <a:p>
+            <a:pPr algn="ctr">
+              <a:lnSpc>
+                <a:spcPct val="112000"/>
+              </a:lnSpc>
+              <a:spcAft>
+                <a:spcPts val="0"/>
+              </a:spcAft>
+            </a:pPr>
+            <a:r>
+              <a:rPr sz="2200" b="1">
+                <a:solidFill>
+                  <a:srgbClr val="FFFFFF"/>
+                </a:solidFill>
+                <a:latin typeface="Microsoft JhengHei"/>
+                <a:ea typeface="Microsoft JhengHei"/>
+                <a:cs typeface="Microsoft JhengHei"/>
+              </a:rPr>
+              <a:t>資料流｜每一步都知道資料在誰手上</a:t>
+            </a:r>
+          </a:p>
+        </p:txBody>
+      </p:sp>
+      <p:sp>
+        <p:nvSpPr>
+          <p:cNvPr id="53" name="Oval 52"/>
+          <p:cNvSpPr/>
+          <p:nvPr/>
+        </p:nvSpPr>
+        <p:spPr>
+          <a:xfrm>
+            <a:off x="1097280" y="25176202"/>
+            <a:ext cx="603504" cy="603504"/>
+          </a:xfrm>
+          <a:prstGeom prst="ellipse">
+            <a:avLst/>
+          </a:prstGeom>
+          <a:solidFill>
+            <a:srgbClr val="F5B020"/>
+          </a:solidFill>
+          <a:ln>
+            <a:noFill/>
+          </a:ln>
+          <a:effectLst>
+            <a:outerShdw blurRad="110000" dist="42000" dir="5400000" rotWithShape="0">
+              <a:srgbClr val="1A2236">
+                <a:alpha val="24000"/>
+              </a:srgbClr>
+            </a:outerShdw>
+          </a:effectLst>
+        </p:spPr>
+        <p:style>
+          <a:lnRef idx="1">
+            <a:schemeClr val="accent1"/>
+          </a:lnRef>
+          <a:fillRef idx="3">
+            <a:schemeClr val="accent1"/>
+          </a:fillRef>
+          <a:effectRef idx="2">
+            <a:schemeClr val="accent1"/>
+          </a:effectRef>
+          <a:fontRef idx="minor">
+            <a:schemeClr val="lt1"/>
+          </a:fontRef>
+        </p:style>
+        <p:txBody>
+          <a:bodyPr rtlCol="0" anchor="ctr"/>
+          <a:lstStyle/>
+          <a:p>
+            <a:pPr algn="ctr"/>
+          </a:p>
+        </p:txBody>
+      </p:sp>
+      <p:sp>
+        <p:nvSpPr>
+          <p:cNvPr id="54" name="TextBox 53"/>
+          <p:cNvSpPr txBox="1"/>
+          <p:nvPr/>
+        </p:nvSpPr>
+        <p:spPr>
+          <a:xfrm>
+            <a:off x="1097280" y="25194490"/>
+            <a:ext cx="603504" cy="566928"/>
+          </a:xfrm>
+          <a:prstGeom prst="rect">
+            <a:avLst/>
+          </a:prstGeom>
+          <a:noFill/>
+        </p:spPr>
+        <p:txBody>
+          <a:bodyPr wrap="square" anchor="ctr" lIns="0" rIns="0" tIns="0" bIns="0">
+            <a:spAutoFit/>
+          </a:bodyPr>
+          <a:lstStyle/>
+          <a:p>
+            <a:pPr algn="ctr">
+              <a:lnSpc>
+                <a:spcPct val="112000"/>
+              </a:lnSpc>
+              <a:spcAft>
+                <a:spcPts val="0"/>
+              </a:spcAft>
+            </a:pPr>
+            <a:r>
+              <a:rPr sz="2700" b="1">
+                <a:solidFill>
+                  <a:srgbClr val="FFFFFF"/>
+                </a:solidFill>
+                <a:latin typeface="Microsoft JhengHei"/>
+                <a:ea typeface="Microsoft JhengHei"/>
+                <a:cs typeface="Microsoft JhengHei"/>
+              </a:rPr>
+              <a:t>04</a:t>
+            </a:r>
+          </a:p>
+        </p:txBody>
+      </p:sp>
+      <p:sp>
+        <p:nvSpPr>
+          <p:cNvPr id="55" name="TextBox 54"/>
+          <p:cNvSpPr txBox="1"/>
+          <p:nvPr/>
+        </p:nvSpPr>
+        <p:spPr>
+          <a:xfrm>
+            <a:off x="1965960" y="25121338"/>
+            <a:ext cx="21945600" cy="777240"/>
           </a:xfrm>
           <a:prstGeom prst="rect">
             <a:avLst/>
@@ -4713,7 +5503,7 @@
               </a:spcAft>
             </a:pPr>
             <a:r>
-              <a:rPr sz="3000" b="1">
+              <a:rPr sz="4200" b="1">
                 <a:solidFill>
                   <a:srgbClr val="1E3A8A"/>
                 </a:solidFill>
@@ -4721,71 +5511,27 @@
                 <a:ea typeface="Microsoft JhengHei"/>
                 <a:cs typeface="Microsoft JhengHei"/>
               </a:rPr>
-              <a:t>可逆資料遮罩</a:t>
-            </a:r>
-          </a:p>
-        </p:txBody>
-      </p:sp>
-      <p:sp>
-        <p:nvSpPr>
-          <p:cNvPr id="39" name="TextBox 38"/>
-          <p:cNvSpPr txBox="1"/>
-          <p:nvPr/>
-        </p:nvSpPr>
-        <p:spPr>
-          <a:xfrm>
-            <a:off x="14987016" y="26430344"/>
-            <a:ext cx="10972800" cy="394238"/>
+              <a:t>AI 任務執行流程 × 信任設計</a:t>
+            </a:r>
+          </a:p>
+        </p:txBody>
+      </p:sp>
+      <p:sp>
+        <p:nvSpPr>
+          <p:cNvPr id="56" name="Rectangle 55"/>
+          <p:cNvSpPr/>
+          <p:nvPr/>
+        </p:nvSpPr>
+        <p:spPr>
+          <a:xfrm>
+            <a:off x="1993391" y="25962586"/>
+            <a:ext cx="1554480" cy="68580"/>
           </a:xfrm>
           <a:prstGeom prst="rect">
             <a:avLst/>
           </a:prstGeom>
-          <a:noFill/>
-        </p:spPr>
-        <p:txBody>
-          <a:bodyPr wrap="square" anchor="t" lIns="0" rIns="0" tIns="0" bIns="0">
-            <a:spAutoFit/>
-          </a:bodyPr>
-          <a:lstStyle/>
-          <a:p>
-            <a:pPr algn="l">
-              <a:lnSpc>
-                <a:spcPct val="120000"/>
-              </a:lnSpc>
-              <a:spcAft>
-                <a:spcPts val="0"/>
-              </a:spcAft>
-            </a:pPr>
-            <a:r>
-              <a:rPr sz="2200" b="0">
-                <a:solidFill>
-                  <a:srgbClr val="5A6B8C"/>
-                </a:solidFill>
-                <a:latin typeface="Microsoft JhengHei"/>
-                <a:ea typeface="Microsoft JhengHei"/>
-                <a:cs typeface="Microsoft JhengHei"/>
-              </a:rPr>
-              <a:t>進模型前，當事人、案號先變代碼；對照表只存事務所機器。</a:t>
-            </a:r>
-          </a:p>
-        </p:txBody>
-      </p:sp>
-      <p:sp>
-        <p:nvSpPr>
-          <p:cNvPr id="40" name="Rectangle 39"/>
-          <p:cNvSpPr/>
-          <p:nvPr/>
-        </p:nvSpPr>
-        <p:spPr>
-          <a:xfrm>
-            <a:off x="14484096" y="27208630"/>
-            <a:ext cx="11887200" cy="1217198"/>
-          </a:xfrm>
-          <a:prstGeom prst="rect">
-            <a:avLst/>
-          </a:prstGeom>
           <a:solidFill>
-            <a:srgbClr val="F5F7FC"/>
+            <a:srgbClr val="F5B020"/>
           </a:solidFill>
           <a:ln>
             <a:noFill/>
@@ -4816,17 +5562,96 @@
       </p:sp>
       <p:sp>
         <p:nvSpPr>
-          <p:cNvPr id="41" name="Rectangle 40"/>
+          <p:cNvPr id="57" name="Rounded Rectangle 56"/>
           <p:cNvSpPr/>
           <p:nvPr/>
         </p:nvSpPr>
         <p:spPr>
           <a:xfrm>
-            <a:off x="14484096" y="27208630"/>
-            <a:ext cx="128016" cy="1217198"/>
+            <a:off x="914400" y="26136322"/>
+            <a:ext cx="12929616" cy="5282287"/>
+          </a:xfrm>
+          <a:prstGeom prst="roundRect">
+            <a:avLst>
+              <a:gd name="adj" fmla="val 5000"/>
+            </a:avLst>
+          </a:prstGeom>
+          <a:solidFill>
+            <a:srgbClr val="FFFFFF"/>
+          </a:solidFill>
+          <a:ln>
+            <a:noFill/>
+          </a:ln>
+          <a:effectLst>
+            <a:outerShdw blurRad="110000" dist="42000" dir="5400000" rotWithShape="0">
+              <a:srgbClr val="1A2236">
+                <a:alpha val="24000"/>
+              </a:srgbClr>
+            </a:outerShdw>
+          </a:effectLst>
+        </p:spPr>
+        <p:style>
+          <a:lnRef idx="1">
+            <a:schemeClr val="accent1"/>
+          </a:lnRef>
+          <a:fillRef idx="3">
+            <a:schemeClr val="accent1"/>
+          </a:fillRef>
+          <a:effectRef idx="2">
+            <a:schemeClr val="accent1"/>
+          </a:effectRef>
+          <a:fontRef idx="minor">
+            <a:schemeClr val="lt1"/>
+          </a:fontRef>
+        </p:style>
+        <p:txBody>
+          <a:bodyPr rtlCol="0" anchor="ctr"/>
+          <a:lstStyle/>
+          <a:p>
+            <a:pPr algn="ctr"/>
+          </a:p>
+        </p:txBody>
+      </p:sp>
+      <p:pic>
+        <p:nvPicPr>
+          <p:cNvPr id="58" name="Picture 57" descr="_tmp_plain_flow_ai.png"/>
+          <p:cNvPicPr>
+            <a:picLocks noChangeAspect="1"/>
+          </p:cNvPicPr>
+          <p:nvPr/>
+        </p:nvPicPr>
+        <p:blipFill>
+          <a:blip r:embed="rId7"/>
+          <a:stretch>
+            <a:fillRect/>
+          </a:stretch>
+        </p:blipFill>
+        <p:spPr>
+          <a:xfrm>
+            <a:off x="2075688" y="26593522"/>
+            <a:ext cx="10607040" cy="4413607"/>
           </a:xfrm>
           <a:prstGeom prst="rect">
             <a:avLst/>
+          </a:prstGeom>
+          <a:effectLst/>
+        </p:spPr>
+      </p:pic>
+      <p:sp>
+        <p:nvSpPr>
+          <p:cNvPr id="59" name="Rounded Rectangle 58"/>
+          <p:cNvSpPr/>
+          <p:nvPr/>
+        </p:nvSpPr>
+        <p:spPr>
+          <a:xfrm>
+            <a:off x="1417320" y="25834570"/>
+            <a:ext cx="7095744" cy="603504"/>
+          </a:xfrm>
+          <a:prstGeom prst="roundRect">
+            <a:avLst>
+              <a:gd name="adj" fmla="val 50000"/>
+            </a:avLst>
           </a:prstGeom>
           <a:solidFill>
             <a:srgbClr val="1E3A8A"/>
@@ -4834,7 +5659,13 @@
           <a:ln>
             <a:noFill/>
           </a:ln>
-          <a:effectLst/>
+          <a:effectLst>
+            <a:outerShdw blurRad="110000" dist="42000" dir="5400000" rotWithShape="0">
+              <a:srgbClr val="1A2236">
+                <a:alpha val="24000"/>
+              </a:srgbClr>
+            </a:outerShdw>
+          </a:effectLst>
         </p:spPr>
         <p:style>
           <a:lnRef idx="1">
@@ -4860,14 +5691,198 @@
       </p:sp>
       <p:sp>
         <p:nvSpPr>
-          <p:cNvPr id="42" name="TextBox 41"/>
+          <p:cNvPr id="60" name="TextBox 59"/>
           <p:cNvSpPr txBox="1"/>
           <p:nvPr/>
         </p:nvSpPr>
         <p:spPr>
           <a:xfrm>
-            <a:off x="14987016" y="27345790"/>
-            <a:ext cx="10972800" cy="640080"/>
+            <a:off x="1417320" y="25834570"/>
+            <a:ext cx="7095744" cy="603504"/>
+          </a:xfrm>
+          <a:prstGeom prst="rect">
+            <a:avLst/>
+          </a:prstGeom>
+          <a:noFill/>
+        </p:spPr>
+        <p:txBody>
+          <a:bodyPr wrap="square" anchor="ctr" lIns="0" rIns="0" tIns="0" bIns="0">
+            <a:spAutoFit/>
+          </a:bodyPr>
+          <a:lstStyle/>
+          <a:p>
+            <a:pPr algn="ctr">
+              <a:lnSpc>
+                <a:spcPct val="112000"/>
+              </a:lnSpc>
+              <a:spcAft>
+                <a:spcPts val="0"/>
+              </a:spcAft>
+            </a:pPr>
+            <a:r>
+              <a:rPr sz="2200" b="1">
+                <a:solidFill>
+                  <a:srgbClr val="FFFFFF"/>
+                </a:solidFill>
+                <a:latin typeface="Microsoft JhengHei"/>
+                <a:ea typeface="Microsoft JhengHei"/>
+                <a:cs typeface="Microsoft JhengHei"/>
+              </a:rPr>
+              <a:t>AI 流程｜先舉證、再下筆、寫完還要驗</a:t>
+            </a:r>
+          </a:p>
+        </p:txBody>
+      </p:sp>
+      <p:sp>
+        <p:nvSpPr>
+          <p:cNvPr id="61" name="Rounded Rectangle 60"/>
+          <p:cNvSpPr/>
+          <p:nvPr/>
+        </p:nvSpPr>
+        <p:spPr>
+          <a:xfrm>
+            <a:off x="14484096" y="26136322"/>
+            <a:ext cx="6272784" cy="2449119"/>
+          </a:xfrm>
+          <a:prstGeom prst="roundRect">
+            <a:avLst>
+              <a:gd name="adj" fmla="val 10000"/>
+            </a:avLst>
+          </a:prstGeom>
+          <a:solidFill>
+            <a:srgbClr val="FFFFFF"/>
+          </a:solidFill>
+          <a:ln>
+            <a:noFill/>
+          </a:ln>
+          <a:effectLst>
+            <a:outerShdw blurRad="110000" dist="42000" dir="5400000" rotWithShape="0">
+              <a:srgbClr val="1A2236">
+                <a:alpha val="24000"/>
+              </a:srgbClr>
+            </a:outerShdw>
+          </a:effectLst>
+        </p:spPr>
+        <p:style>
+          <a:lnRef idx="1">
+            <a:schemeClr val="accent1"/>
+          </a:lnRef>
+          <a:fillRef idx="3">
+            <a:schemeClr val="accent1"/>
+          </a:fillRef>
+          <a:effectRef idx="2">
+            <a:schemeClr val="accent1"/>
+          </a:effectRef>
+          <a:fontRef idx="minor">
+            <a:schemeClr val="lt1"/>
+          </a:fontRef>
+        </p:style>
+        <p:txBody>
+          <a:bodyPr rtlCol="0" anchor="ctr"/>
+          <a:lstStyle/>
+          <a:p>
+            <a:pPr algn="ctr"/>
+          </a:p>
+        </p:txBody>
+      </p:sp>
+      <p:sp>
+        <p:nvSpPr>
+          <p:cNvPr id="62" name="Oval 61"/>
+          <p:cNvSpPr/>
+          <p:nvPr/>
+        </p:nvSpPr>
+        <p:spPr>
+          <a:xfrm>
+            <a:off x="14868144" y="26520370"/>
+            <a:ext cx="512064" cy="512064"/>
+          </a:xfrm>
+          <a:prstGeom prst="ellipse">
+            <a:avLst/>
+          </a:prstGeom>
+          <a:solidFill>
+            <a:srgbClr val="F5B020"/>
+          </a:solidFill>
+          <a:ln>
+            <a:noFill/>
+          </a:ln>
+          <a:effectLst/>
+        </p:spPr>
+        <p:style>
+          <a:lnRef idx="1">
+            <a:schemeClr val="accent1"/>
+          </a:lnRef>
+          <a:fillRef idx="3">
+            <a:schemeClr val="accent1"/>
+          </a:fillRef>
+          <a:effectRef idx="2">
+            <a:schemeClr val="accent1"/>
+          </a:effectRef>
+          <a:fontRef idx="minor">
+            <a:schemeClr val="lt1"/>
+          </a:fontRef>
+        </p:style>
+        <p:txBody>
+          <a:bodyPr rtlCol="0" anchor="ctr"/>
+          <a:lstStyle/>
+          <a:p>
+            <a:pPr algn="ctr"/>
+          </a:p>
+        </p:txBody>
+      </p:sp>
+      <p:sp>
+        <p:nvSpPr>
+          <p:cNvPr id="63" name="TextBox 62"/>
+          <p:cNvSpPr txBox="1"/>
+          <p:nvPr/>
+        </p:nvSpPr>
+        <p:spPr>
+          <a:xfrm>
+            <a:off x="14868144" y="26529514"/>
+            <a:ext cx="512064" cy="493776"/>
+          </a:xfrm>
+          <a:prstGeom prst="rect">
+            <a:avLst/>
+          </a:prstGeom>
+          <a:noFill/>
+        </p:spPr>
+        <p:txBody>
+          <a:bodyPr wrap="square" anchor="ctr" lIns="0" rIns="0" tIns="0" bIns="0">
+            <a:spAutoFit/>
+          </a:bodyPr>
+          <a:lstStyle/>
+          <a:p>
+            <a:pPr algn="ctr">
+              <a:lnSpc>
+                <a:spcPct val="112000"/>
+              </a:lnSpc>
+              <a:spcAft>
+                <a:spcPts val="0"/>
+              </a:spcAft>
+            </a:pPr>
+            <a:r>
+              <a:rPr sz="2400" b="1">
+                <a:solidFill>
+                  <a:srgbClr val="FFFFFF"/>
+                </a:solidFill>
+                <a:latin typeface="Microsoft JhengHei"/>
+                <a:ea typeface="Microsoft JhengHei"/>
+                <a:cs typeface="Microsoft JhengHei"/>
+              </a:rPr>
+              <a:t>✓</a:t>
+            </a:r>
+          </a:p>
+        </p:txBody>
+      </p:sp>
+      <p:sp>
+        <p:nvSpPr>
+          <p:cNvPr id="64" name="TextBox 63"/>
+          <p:cNvSpPr txBox="1"/>
+          <p:nvPr/>
+        </p:nvSpPr>
+        <p:spPr>
+          <a:xfrm>
+            <a:off x="15581376" y="26520370"/>
+            <a:ext cx="4901184" cy="548640"/>
           </a:xfrm>
           <a:prstGeom prst="rect">
             <a:avLst/>
@@ -4889,7 +5904,7 @@
               </a:spcAft>
             </a:pPr>
             <a:r>
-              <a:rPr sz="3000" b="1">
+              <a:rPr sz="2800" b="1">
                 <a:solidFill>
                   <a:srgbClr val="1E3A8A"/>
                 </a:solidFill>
@@ -4897,21 +5912,21 @@
                 <a:ea typeface="Microsoft JhengHei"/>
                 <a:cs typeface="Microsoft JhengHei"/>
               </a:rPr>
-              <a:t>引證驗證硬牆</a:t>
-            </a:r>
-          </a:p>
-        </p:txBody>
-      </p:sp>
-      <p:sp>
-        <p:nvSpPr>
-          <p:cNvPr id="43" name="TextBox 42"/>
+              <a:t>可逆資料遮罩</a:t>
+            </a:r>
+          </a:p>
+        </p:txBody>
+      </p:sp>
+      <p:sp>
+        <p:nvSpPr>
+          <p:cNvPr id="65" name="TextBox 64"/>
           <p:cNvSpPr txBox="1"/>
           <p:nvPr/>
         </p:nvSpPr>
         <p:spPr>
           <a:xfrm>
-            <a:off x="14987016" y="27921862"/>
-            <a:ext cx="10972800" cy="394238"/>
+            <a:off x="14895576" y="27215314"/>
+            <a:ext cx="5449824" cy="1168959"/>
           </a:xfrm>
           <a:prstGeom prst="rect">
             <a:avLst/>
@@ -4926,14 +5941,14 @@
           <a:p>
             <a:pPr algn="l">
               <a:lnSpc>
-                <a:spcPct val="120000"/>
+                <a:spcPct val="122000"/>
               </a:lnSpc>
               <a:spcAft>
                 <a:spcPts val="0"/>
               </a:spcAft>
             </a:pPr>
             <a:r>
-              <a:rPr sz="2200" b="0">
+              <a:rPr sz="2100" b="0">
                 <a:solidFill>
                   <a:srgbClr val="5A6B8C"/>
                 </a:solidFill>
@@ -4941,27 +5956,79 @@
                 <a:ea typeface="Microsoft JhengHei"/>
                 <a:cs typeface="Microsoft JhengHei"/>
               </a:rPr>
-              <a:t>引用逐一比對檢索結果；捏造的直接剝除並標示，不可繞過。</a:t>
-            </a:r>
-          </a:p>
-        </p:txBody>
-      </p:sp>
-      <p:sp>
-        <p:nvSpPr>
-          <p:cNvPr id="44" name="Rectangle 43"/>
+              <a:t>進模型前當事人、案號先變代碼；對照表只存事務所機器。</a:t>
+            </a:r>
+          </a:p>
+        </p:txBody>
+      </p:sp>
+      <p:sp>
+        <p:nvSpPr>
+          <p:cNvPr id="66" name="Rounded Rectangle 65"/>
           <p:cNvSpPr/>
           <p:nvPr/>
         </p:nvSpPr>
         <p:spPr>
           <a:xfrm>
-            <a:off x="14484096" y="28700148"/>
-            <a:ext cx="11887200" cy="1217198"/>
-          </a:xfrm>
-          <a:prstGeom prst="rect">
-            <a:avLst/>
+            <a:off x="21140928" y="26136322"/>
+            <a:ext cx="6272784" cy="2449119"/>
+          </a:xfrm>
+          <a:prstGeom prst="roundRect">
+            <a:avLst>
+              <a:gd name="adj" fmla="val 10000"/>
+            </a:avLst>
           </a:prstGeom>
           <a:solidFill>
-            <a:srgbClr val="F5F7FC"/>
+            <a:srgbClr val="FFFFFF"/>
+          </a:solidFill>
+          <a:ln>
+            <a:noFill/>
+          </a:ln>
+          <a:effectLst>
+            <a:outerShdw blurRad="110000" dist="42000" dir="5400000" rotWithShape="0">
+              <a:srgbClr val="1A2236">
+                <a:alpha val="24000"/>
+              </a:srgbClr>
+            </a:outerShdw>
+          </a:effectLst>
+        </p:spPr>
+        <p:style>
+          <a:lnRef idx="1">
+            <a:schemeClr val="accent1"/>
+          </a:lnRef>
+          <a:fillRef idx="3">
+            <a:schemeClr val="accent1"/>
+          </a:fillRef>
+          <a:effectRef idx="2">
+            <a:schemeClr val="accent1"/>
+          </a:effectRef>
+          <a:fontRef idx="minor">
+            <a:schemeClr val="lt1"/>
+          </a:fontRef>
+        </p:style>
+        <p:txBody>
+          <a:bodyPr rtlCol="0" anchor="ctr"/>
+          <a:lstStyle/>
+          <a:p>
+            <a:pPr algn="ctr"/>
+          </a:p>
+        </p:txBody>
+      </p:sp>
+      <p:sp>
+        <p:nvSpPr>
+          <p:cNvPr id="67" name="Oval 66"/>
+          <p:cNvSpPr/>
+          <p:nvPr/>
+        </p:nvSpPr>
+        <p:spPr>
+          <a:xfrm>
+            <a:off x="21524976" y="26520370"/>
+            <a:ext cx="512064" cy="512064"/>
+          </a:xfrm>
+          <a:prstGeom prst="ellipse">
+            <a:avLst/>
+          </a:prstGeom>
+          <a:solidFill>
+            <a:srgbClr val="F5B020"/>
           </a:solidFill>
           <a:ln>
             <a:noFill/>
@@ -4992,58 +6059,58 @@
       </p:sp>
       <p:sp>
         <p:nvSpPr>
-          <p:cNvPr id="45" name="Rectangle 44"/>
-          <p:cNvSpPr/>
-          <p:nvPr/>
-        </p:nvSpPr>
-        <p:spPr>
-          <a:xfrm>
-            <a:off x="14484096" y="28700148"/>
-            <a:ext cx="128016" cy="1217198"/>
+          <p:cNvPr id="68" name="TextBox 67"/>
+          <p:cNvSpPr txBox="1"/>
+          <p:nvPr/>
+        </p:nvSpPr>
+        <p:spPr>
+          <a:xfrm>
+            <a:off x="21524976" y="26529514"/>
+            <a:ext cx="512064" cy="493776"/>
           </a:xfrm>
           <a:prstGeom prst="rect">
             <a:avLst/>
           </a:prstGeom>
-          <a:solidFill>
-            <a:srgbClr val="1E3A8A"/>
-          </a:solidFill>
-          <a:ln>
-            <a:noFill/>
-          </a:ln>
-          <a:effectLst/>
-        </p:spPr>
-        <p:style>
-          <a:lnRef idx="1">
-            <a:schemeClr val="accent1"/>
-          </a:lnRef>
-          <a:fillRef idx="3">
-            <a:schemeClr val="accent1"/>
-          </a:fillRef>
-          <a:effectRef idx="2">
-            <a:schemeClr val="accent1"/>
-          </a:effectRef>
-          <a:fontRef idx="minor">
-            <a:schemeClr val="lt1"/>
-          </a:fontRef>
-        </p:style>
-        <p:txBody>
-          <a:bodyPr rtlCol="0" anchor="ctr"/>
-          <a:lstStyle/>
-          <a:p>
-            <a:pPr algn="ctr"/>
-          </a:p>
-        </p:txBody>
-      </p:sp>
-      <p:sp>
-        <p:nvSpPr>
-          <p:cNvPr id="46" name="TextBox 45"/>
+          <a:noFill/>
+        </p:spPr>
+        <p:txBody>
+          <a:bodyPr wrap="square" anchor="ctr" lIns="0" rIns="0" tIns="0" bIns="0">
+            <a:spAutoFit/>
+          </a:bodyPr>
+          <a:lstStyle/>
+          <a:p>
+            <a:pPr algn="ctr">
+              <a:lnSpc>
+                <a:spcPct val="112000"/>
+              </a:lnSpc>
+              <a:spcAft>
+                <a:spcPts val="0"/>
+              </a:spcAft>
+            </a:pPr>
+            <a:r>
+              <a:rPr sz="2400" b="1">
+                <a:solidFill>
+                  <a:srgbClr val="FFFFFF"/>
+                </a:solidFill>
+                <a:latin typeface="Microsoft JhengHei"/>
+                <a:ea typeface="Microsoft JhengHei"/>
+                <a:cs typeface="Microsoft JhengHei"/>
+              </a:rPr>
+              <a:t>✓</a:t>
+            </a:r>
+          </a:p>
+        </p:txBody>
+      </p:sp>
+      <p:sp>
+        <p:nvSpPr>
+          <p:cNvPr id="69" name="TextBox 68"/>
           <p:cNvSpPr txBox="1"/>
           <p:nvPr/>
         </p:nvSpPr>
         <p:spPr>
           <a:xfrm>
-            <a:off x="14987016" y="28837308"/>
-            <a:ext cx="10972800" cy="640080"/>
+            <a:off x="22238208" y="26520370"/>
+            <a:ext cx="4901184" cy="548640"/>
           </a:xfrm>
           <a:prstGeom prst="rect">
             <a:avLst/>
@@ -5065,7 +6132,7 @@
               </a:spcAft>
             </a:pPr>
             <a:r>
-              <a:rPr sz="3000" b="1">
+              <a:rPr sz="2800" b="1">
                 <a:solidFill>
                   <a:srgbClr val="1E3A8A"/>
                 </a:solidFill>
@@ -5073,21 +6140,21 @@
                 <a:ea typeface="Microsoft JhengHei"/>
                 <a:cs typeface="Microsoft JhengHei"/>
               </a:rPr>
-              <a:t>不可竄改稽核</a:t>
-            </a:r>
-          </a:p>
-        </p:txBody>
-      </p:sp>
-      <p:sp>
-        <p:nvSpPr>
-          <p:cNvPr id="47" name="TextBox 46"/>
+              <a:t>引證驗證硬牆</a:t>
+            </a:r>
+          </a:p>
+        </p:txBody>
+      </p:sp>
+      <p:sp>
+        <p:nvSpPr>
+          <p:cNvPr id="70" name="TextBox 69"/>
           <p:cNvSpPr txBox="1"/>
           <p:nvPr/>
         </p:nvSpPr>
         <p:spPr>
           <a:xfrm>
-            <a:off x="14987016" y="29413380"/>
-            <a:ext cx="10972800" cy="394238"/>
+            <a:off x="21552408" y="27215314"/>
+            <a:ext cx="5449824" cy="1168959"/>
           </a:xfrm>
           <a:prstGeom prst="rect">
             <a:avLst/>
@@ -5102,14 +6169,14 @@
           <a:p>
             <a:pPr algn="l">
               <a:lnSpc>
-                <a:spcPct val="120000"/>
+                <a:spcPct val="122000"/>
               </a:lnSpc>
               <a:spcAft>
                 <a:spcPts val="0"/>
               </a:spcAft>
             </a:pPr>
             <a:r>
-              <a:rPr sz="2200" b="0">
+              <a:rPr sz="2100" b="0">
                 <a:solidFill>
                   <a:srgbClr val="5A6B8C"/>
                 </a:solidFill>
@@ -5117,27 +6184,79 @@
                 <a:ea typeface="Microsoft JhengHei"/>
                 <a:cs typeface="Microsoft JhengHei"/>
               </a:rPr>
-              <a:t>每筆請求一列紀錄、雜湊鏈串接；竄改即現形，一鍵可驗。</a:t>
-            </a:r>
-          </a:p>
-        </p:txBody>
-      </p:sp>
-      <p:sp>
-        <p:nvSpPr>
-          <p:cNvPr id="48" name="Rectangle 47"/>
+              <a:t>引用逐一比對檢索結果；捏造的直接剝除標示，不可繞過。</a:t>
+            </a:r>
+          </a:p>
+        </p:txBody>
+      </p:sp>
+      <p:sp>
+        <p:nvSpPr>
+          <p:cNvPr id="71" name="Rounded Rectangle 70"/>
           <p:cNvSpPr/>
           <p:nvPr/>
         </p:nvSpPr>
         <p:spPr>
           <a:xfrm>
-            <a:off x="14484096" y="30191666"/>
-            <a:ext cx="11887200" cy="1217198"/>
-          </a:xfrm>
-          <a:prstGeom prst="rect">
-            <a:avLst/>
+            <a:off x="14484096" y="28969489"/>
+            <a:ext cx="6272784" cy="2449119"/>
+          </a:xfrm>
+          <a:prstGeom prst="roundRect">
+            <a:avLst>
+              <a:gd name="adj" fmla="val 10000"/>
+            </a:avLst>
           </a:prstGeom>
           <a:solidFill>
-            <a:srgbClr val="F5F7FC"/>
+            <a:srgbClr val="FFFFFF"/>
+          </a:solidFill>
+          <a:ln>
+            <a:noFill/>
+          </a:ln>
+          <a:effectLst>
+            <a:outerShdw blurRad="110000" dist="42000" dir="5400000" rotWithShape="0">
+              <a:srgbClr val="1A2236">
+                <a:alpha val="24000"/>
+              </a:srgbClr>
+            </a:outerShdw>
+          </a:effectLst>
+        </p:spPr>
+        <p:style>
+          <a:lnRef idx="1">
+            <a:schemeClr val="accent1"/>
+          </a:lnRef>
+          <a:fillRef idx="3">
+            <a:schemeClr val="accent1"/>
+          </a:fillRef>
+          <a:effectRef idx="2">
+            <a:schemeClr val="accent1"/>
+          </a:effectRef>
+          <a:fontRef idx="minor">
+            <a:schemeClr val="lt1"/>
+          </a:fontRef>
+        </p:style>
+        <p:txBody>
+          <a:bodyPr rtlCol="0" anchor="ctr"/>
+          <a:lstStyle/>
+          <a:p>
+            <a:pPr algn="ctr"/>
+          </a:p>
+        </p:txBody>
+      </p:sp>
+      <p:sp>
+        <p:nvSpPr>
+          <p:cNvPr id="72" name="Oval 71"/>
+          <p:cNvSpPr/>
+          <p:nvPr/>
+        </p:nvSpPr>
+        <p:spPr>
+          <a:xfrm>
+            <a:off x="14868144" y="29353537"/>
+            <a:ext cx="512064" cy="512064"/>
+          </a:xfrm>
+          <a:prstGeom prst="ellipse">
+            <a:avLst/>
+          </a:prstGeom>
+          <a:solidFill>
+            <a:srgbClr val="F5B020"/>
           </a:solidFill>
           <a:ln>
             <a:noFill/>
@@ -5168,58 +6287,58 @@
       </p:sp>
       <p:sp>
         <p:nvSpPr>
-          <p:cNvPr id="49" name="Rectangle 48"/>
-          <p:cNvSpPr/>
-          <p:nvPr/>
-        </p:nvSpPr>
-        <p:spPr>
-          <a:xfrm>
-            <a:off x="14484096" y="30191666"/>
-            <a:ext cx="128016" cy="1217198"/>
+          <p:cNvPr id="73" name="TextBox 72"/>
+          <p:cNvSpPr txBox="1"/>
+          <p:nvPr/>
+        </p:nvSpPr>
+        <p:spPr>
+          <a:xfrm>
+            <a:off x="14868144" y="29362681"/>
+            <a:ext cx="512064" cy="493776"/>
           </a:xfrm>
           <a:prstGeom prst="rect">
             <a:avLst/>
           </a:prstGeom>
-          <a:solidFill>
-            <a:srgbClr val="1E3A8A"/>
-          </a:solidFill>
-          <a:ln>
-            <a:noFill/>
-          </a:ln>
-          <a:effectLst/>
-        </p:spPr>
-        <p:style>
-          <a:lnRef idx="1">
-            <a:schemeClr val="accent1"/>
-          </a:lnRef>
-          <a:fillRef idx="3">
-            <a:schemeClr val="accent1"/>
-          </a:fillRef>
-          <a:effectRef idx="2">
-            <a:schemeClr val="accent1"/>
-          </a:effectRef>
-          <a:fontRef idx="minor">
-            <a:schemeClr val="lt1"/>
-          </a:fontRef>
-        </p:style>
-        <p:txBody>
-          <a:bodyPr rtlCol="0" anchor="ctr"/>
-          <a:lstStyle/>
-          <a:p>
-            <a:pPr algn="ctr"/>
-          </a:p>
-        </p:txBody>
-      </p:sp>
-      <p:sp>
-        <p:nvSpPr>
-          <p:cNvPr id="50" name="TextBox 49"/>
+          <a:noFill/>
+        </p:spPr>
+        <p:txBody>
+          <a:bodyPr wrap="square" anchor="ctr" lIns="0" rIns="0" tIns="0" bIns="0">
+            <a:spAutoFit/>
+          </a:bodyPr>
+          <a:lstStyle/>
+          <a:p>
+            <a:pPr algn="ctr">
+              <a:lnSpc>
+                <a:spcPct val="112000"/>
+              </a:lnSpc>
+              <a:spcAft>
+                <a:spcPts val="0"/>
+              </a:spcAft>
+            </a:pPr>
+            <a:r>
+              <a:rPr sz="2400" b="1">
+                <a:solidFill>
+                  <a:srgbClr val="FFFFFF"/>
+                </a:solidFill>
+                <a:latin typeface="Microsoft JhengHei"/>
+                <a:ea typeface="Microsoft JhengHei"/>
+                <a:cs typeface="Microsoft JhengHei"/>
+              </a:rPr>
+              <a:t>✓</a:t>
+            </a:r>
+          </a:p>
+        </p:txBody>
+      </p:sp>
+      <p:sp>
+        <p:nvSpPr>
+          <p:cNvPr id="74" name="TextBox 73"/>
           <p:cNvSpPr txBox="1"/>
           <p:nvPr/>
         </p:nvSpPr>
         <p:spPr>
           <a:xfrm>
-            <a:off x="14987016" y="30328826"/>
-            <a:ext cx="10972800" cy="640080"/>
+            <a:off x="15581376" y="29353537"/>
+            <a:ext cx="4901184" cy="548640"/>
           </a:xfrm>
           <a:prstGeom prst="rect">
             <a:avLst/>
@@ -5241,7 +6360,7 @@
               </a:spcAft>
             </a:pPr>
             <a:r>
-              <a:rPr sz="3000" b="1">
+              <a:rPr sz="2800" b="1">
                 <a:solidFill>
                   <a:srgbClr val="1E3A8A"/>
                 </a:solidFill>
@@ -5249,21 +6368,21 @@
                 <a:ea typeface="Microsoft JhengHei"/>
                 <a:cs typeface="Microsoft JhengHei"/>
               </a:rPr>
-              <a:t>機密強制地端</a:t>
-            </a:r>
-          </a:p>
-        </p:txBody>
-      </p:sp>
-      <p:sp>
-        <p:nvSpPr>
-          <p:cNvPr id="51" name="TextBox 50"/>
+              <a:t>不可竄改稽核</a:t>
+            </a:r>
+          </a:p>
+        </p:txBody>
+      </p:sp>
+      <p:sp>
+        <p:nvSpPr>
+          <p:cNvPr id="75" name="TextBox 74"/>
           <p:cNvSpPr txBox="1"/>
           <p:nvPr/>
         </p:nvSpPr>
         <p:spPr>
           <a:xfrm>
-            <a:off x="14987016" y="30904898"/>
-            <a:ext cx="10972800" cy="394238"/>
+            <a:off x="14895576" y="30048481"/>
+            <a:ext cx="5449824" cy="1168959"/>
           </a:xfrm>
           <a:prstGeom prst="rect">
             <a:avLst/>
@@ -5278,14 +6397,14 @@
           <a:p>
             <a:pPr algn="l">
               <a:lnSpc>
-                <a:spcPct val="120000"/>
+                <a:spcPct val="122000"/>
               </a:lnSpc>
               <a:spcAft>
                 <a:spcPts val="0"/>
               </a:spcAft>
             </a:pPr>
             <a:r>
-              <a:rPr sz="2200" b="0">
+              <a:rPr sz="2100" b="0">
                 <a:solidFill>
                   <a:srgbClr val="5A6B8C"/>
                 </a:solidFill>
@@ -5293,23 +6412,75 @@
                 <a:ea typeface="Microsoft JhengHei"/>
                 <a:cs typeface="Microsoft JhengHei"/>
               </a:rPr>
-              <a:t>機密案件強制走本地模型；設定錯誤時程式層直接拒絕外送。</a:t>
-            </a:r>
-          </a:p>
-        </p:txBody>
-      </p:sp>
-      <p:sp>
-        <p:nvSpPr>
-          <p:cNvPr id="52" name="Rectangle 51"/>
+              <a:t>每筆請求一列紀錄、雜湊鏈串接；竄改即現形，一鍵可驗。</a:t>
+            </a:r>
+          </a:p>
+        </p:txBody>
+      </p:sp>
+      <p:sp>
+        <p:nvSpPr>
+          <p:cNvPr id="76" name="Rounded Rectangle 75"/>
           <p:cNvSpPr/>
           <p:nvPr/>
         </p:nvSpPr>
         <p:spPr>
           <a:xfrm>
-            <a:off x="1097280" y="32067233"/>
-            <a:ext cx="384048" cy="384048"/>
-          </a:xfrm>
-          <a:prstGeom prst="rect">
+            <a:off x="21140928" y="28969489"/>
+            <a:ext cx="6272784" cy="2449119"/>
+          </a:xfrm>
+          <a:prstGeom prst="roundRect">
+            <a:avLst>
+              <a:gd name="adj" fmla="val 10000"/>
+            </a:avLst>
+          </a:prstGeom>
+          <a:solidFill>
+            <a:srgbClr val="FFFFFF"/>
+          </a:solidFill>
+          <a:ln>
+            <a:noFill/>
+          </a:ln>
+          <a:effectLst>
+            <a:outerShdw blurRad="110000" dist="42000" dir="5400000" rotWithShape="0">
+              <a:srgbClr val="1A2236">
+                <a:alpha val="24000"/>
+              </a:srgbClr>
+            </a:outerShdw>
+          </a:effectLst>
+        </p:spPr>
+        <p:style>
+          <a:lnRef idx="1">
+            <a:schemeClr val="accent1"/>
+          </a:lnRef>
+          <a:fillRef idx="3">
+            <a:schemeClr val="accent1"/>
+          </a:fillRef>
+          <a:effectRef idx="2">
+            <a:schemeClr val="accent1"/>
+          </a:effectRef>
+          <a:fontRef idx="minor">
+            <a:schemeClr val="lt1"/>
+          </a:fontRef>
+        </p:style>
+        <p:txBody>
+          <a:bodyPr rtlCol="0" anchor="ctr"/>
+          <a:lstStyle/>
+          <a:p>
+            <a:pPr algn="ctr"/>
+          </a:p>
+        </p:txBody>
+      </p:sp>
+      <p:sp>
+        <p:nvSpPr>
+          <p:cNvPr id="77" name="Oval 76"/>
+          <p:cNvSpPr/>
+          <p:nvPr/>
+        </p:nvSpPr>
+        <p:spPr>
+          <a:xfrm>
+            <a:off x="21524976" y="29353537"/>
+            <a:ext cx="512064" cy="512064"/>
+          </a:xfrm>
+          <a:prstGeom prst="ellipse">
             <a:avLst/>
           </a:prstGeom>
           <a:solidFill>
@@ -5344,14 +6515,58 @@
       </p:sp>
       <p:sp>
         <p:nvSpPr>
-          <p:cNvPr id="53" name="TextBox 52"/>
+          <p:cNvPr id="78" name="TextBox 77"/>
           <p:cNvSpPr txBox="1"/>
           <p:nvPr/>
         </p:nvSpPr>
         <p:spPr>
           <a:xfrm>
-            <a:off x="1737360" y="31957505"/>
-            <a:ext cx="12801600" cy="914400"/>
+            <a:off x="21524976" y="29362681"/>
+            <a:ext cx="512064" cy="493776"/>
+          </a:xfrm>
+          <a:prstGeom prst="rect">
+            <a:avLst/>
+          </a:prstGeom>
+          <a:noFill/>
+        </p:spPr>
+        <p:txBody>
+          <a:bodyPr wrap="square" anchor="ctr" lIns="0" rIns="0" tIns="0" bIns="0">
+            <a:spAutoFit/>
+          </a:bodyPr>
+          <a:lstStyle/>
+          <a:p>
+            <a:pPr algn="ctr">
+              <a:lnSpc>
+                <a:spcPct val="112000"/>
+              </a:lnSpc>
+              <a:spcAft>
+                <a:spcPts val="0"/>
+              </a:spcAft>
+            </a:pPr>
+            <a:r>
+              <a:rPr sz="2400" b="1">
+                <a:solidFill>
+                  <a:srgbClr val="FFFFFF"/>
+                </a:solidFill>
+                <a:latin typeface="Microsoft JhengHei"/>
+                <a:ea typeface="Microsoft JhengHei"/>
+                <a:cs typeface="Microsoft JhengHei"/>
+              </a:rPr>
+              <a:t>✓</a:t>
+            </a:r>
+          </a:p>
+        </p:txBody>
+      </p:sp>
+      <p:sp>
+        <p:nvSpPr>
+          <p:cNvPr id="79" name="TextBox 78"/>
+          <p:cNvSpPr txBox="1"/>
+          <p:nvPr/>
+        </p:nvSpPr>
+        <p:spPr>
+          <a:xfrm>
+            <a:off x="22238208" y="29353537"/>
+            <a:ext cx="4901184" cy="548640"/>
           </a:xfrm>
           <a:prstGeom prst="rect">
             <a:avLst/>
@@ -5373,99 +6588,90 @@
               </a:spcAft>
             </a:pPr>
             <a:r>
-              <a:rPr sz="3800" b="1">
-                <a:solidFill>
-                  <a:srgbClr val="F5B020"/>
+              <a:rPr sz="2800" b="1">
+                <a:solidFill>
+                  <a:srgbClr val="1E3A8A"/>
                 </a:solidFill>
                 <a:latin typeface="Microsoft JhengHei"/>
                 <a:ea typeface="Microsoft JhengHei"/>
                 <a:cs typeface="Microsoft JhengHei"/>
               </a:rPr>
-              <a:t>05 </a:t>
-            </a:r>
-            <a:r>
-              <a:rPr sz="3800" b="1">
-                <a:solidFill>
-                  <a:srgbClr val="1E3A8A"/>
+              <a:t>機密強制地端</a:t>
+            </a:r>
+          </a:p>
+        </p:txBody>
+      </p:sp>
+      <p:sp>
+        <p:nvSpPr>
+          <p:cNvPr id="80" name="TextBox 79"/>
+          <p:cNvSpPr txBox="1"/>
+          <p:nvPr/>
+        </p:nvSpPr>
+        <p:spPr>
+          <a:xfrm>
+            <a:off x="21552408" y="30048481"/>
+            <a:ext cx="5449824" cy="1168959"/>
+          </a:xfrm>
+          <a:prstGeom prst="rect">
+            <a:avLst/>
+          </a:prstGeom>
+          <a:noFill/>
+        </p:spPr>
+        <p:txBody>
+          <a:bodyPr wrap="square" anchor="t" lIns="0" rIns="0" tIns="0" bIns="0">
+            <a:spAutoFit/>
+          </a:bodyPr>
+          <a:lstStyle/>
+          <a:p>
+            <a:pPr algn="l">
+              <a:lnSpc>
+                <a:spcPct val="122000"/>
+              </a:lnSpc>
+              <a:spcAft>
+                <a:spcPts val="0"/>
+              </a:spcAft>
+            </a:pPr>
+            <a:r>
+              <a:rPr sz="2100" b="0">
+                <a:solidFill>
+                  <a:srgbClr val="5A6B8C"/>
                 </a:solidFill>
                 <a:latin typeface="Microsoft JhengHei"/>
                 <a:ea typeface="Microsoft JhengHei"/>
                 <a:cs typeface="Microsoft JhengHei"/>
               </a:rPr>
-              <a:t>· 運行實況 — 真實模型、實機鏈路</a:t>
-            </a:r>
-          </a:p>
-        </p:txBody>
-      </p:sp>
-      <p:pic>
-        <p:nvPicPr>
-          <p:cNvPr id="54" name="Picture 53" descr="real_05_result_real_qwen.png"/>
-          <p:cNvPicPr>
-            <a:picLocks noChangeAspect="1"/>
-          </p:cNvPicPr>
-          <p:nvPr/>
-        </p:nvPicPr>
-        <p:blipFill>
-          <a:blip r:embed="rId7"/>
-          <a:stretch>
-            <a:fillRect/>
-          </a:stretch>
-        </p:blipFill>
-        <p:spPr>
-          <a:xfrm>
-            <a:off x="1956816" y="32917625"/>
-            <a:ext cx="7315200" cy="4572000"/>
-          </a:xfrm>
-          <a:prstGeom prst="rect">
-            <a:avLst/>
-          </a:prstGeom>
-        </p:spPr>
-      </p:pic>
-      <p:pic>
-        <p:nvPicPr>
-          <p:cNvPr id="55" name="Picture 54" descr="real_08_chain_verified.png"/>
-          <p:cNvPicPr>
-            <a:picLocks noChangeAspect="1"/>
-          </p:cNvPicPr>
-          <p:nvPr/>
-        </p:nvPicPr>
-        <p:blipFill>
-          <a:blip r:embed="rId8"/>
-          <a:stretch>
-            <a:fillRect/>
-          </a:stretch>
-        </p:blipFill>
-        <p:spPr>
-          <a:xfrm>
-            <a:off x="9729216" y="32917625"/>
-            <a:ext cx="7315200" cy="4572000"/>
-          </a:xfrm>
-          <a:prstGeom prst="rect">
-            <a:avLst/>
-          </a:prstGeom>
-        </p:spPr>
-      </p:pic>
-      <p:sp>
-        <p:nvSpPr>
-          <p:cNvPr id="56" name="Rectangle 55"/>
+              <a:t>機密案件強制走本地模型；設錯時程式層直接拒絕外送。</a:t>
+            </a:r>
+          </a:p>
+        </p:txBody>
+      </p:sp>
+      <p:sp>
+        <p:nvSpPr>
+          <p:cNvPr id="81" name="Oval 80"/>
           <p:cNvSpPr/>
           <p:nvPr/>
         </p:nvSpPr>
         <p:spPr>
           <a:xfrm>
-            <a:off x="17501616" y="32917625"/>
-            <a:ext cx="8869680" cy="4572000"/>
-          </a:xfrm>
-          <a:prstGeom prst="rect">
+            <a:off x="1097280" y="31967249"/>
+            <a:ext cx="603504" cy="603504"/>
+          </a:xfrm>
+          <a:prstGeom prst="ellipse">
             <a:avLst/>
           </a:prstGeom>
           <a:solidFill>
-            <a:srgbClr val="12245C"/>
+            <a:srgbClr val="F5B020"/>
           </a:solidFill>
           <a:ln>
             <a:noFill/>
           </a:ln>
-          <a:effectLst/>
+          <a:effectLst>
+            <a:outerShdw blurRad="110000" dist="42000" dir="5400000" rotWithShape="0">
+              <a:srgbClr val="1A2236">
+                <a:alpha val="24000"/>
+              </a:srgbClr>
+            </a:outerShdw>
+          </a:effectLst>
         </p:spPr>
         <p:style>
           <a:lnRef idx="1">
@@ -5491,14 +6697,58 @@
       </p:sp>
       <p:sp>
         <p:nvSpPr>
-          <p:cNvPr id="57" name="TextBox 56"/>
+          <p:cNvPr id="82" name="TextBox 81"/>
           <p:cNvSpPr txBox="1"/>
           <p:nvPr/>
         </p:nvSpPr>
         <p:spPr>
           <a:xfrm>
-            <a:off x="18141696" y="33077645"/>
-            <a:ext cx="7772400" cy="731520"/>
+            <a:off x="1097280" y="31985537"/>
+            <a:ext cx="603504" cy="566928"/>
+          </a:xfrm>
+          <a:prstGeom prst="rect">
+            <a:avLst/>
+          </a:prstGeom>
+          <a:noFill/>
+        </p:spPr>
+        <p:txBody>
+          <a:bodyPr wrap="square" anchor="ctr" lIns="0" rIns="0" tIns="0" bIns="0">
+            <a:spAutoFit/>
+          </a:bodyPr>
+          <a:lstStyle/>
+          <a:p>
+            <a:pPr algn="ctr">
+              <a:lnSpc>
+                <a:spcPct val="112000"/>
+              </a:lnSpc>
+              <a:spcAft>
+                <a:spcPts val="0"/>
+              </a:spcAft>
+            </a:pPr>
+            <a:r>
+              <a:rPr sz="2700" b="1">
+                <a:solidFill>
+                  <a:srgbClr val="FFFFFF"/>
+                </a:solidFill>
+                <a:latin typeface="Microsoft JhengHei"/>
+                <a:ea typeface="Microsoft JhengHei"/>
+                <a:cs typeface="Microsoft JhengHei"/>
+              </a:rPr>
+              <a:t>05</a:t>
+            </a:r>
+          </a:p>
+        </p:txBody>
+      </p:sp>
+      <p:sp>
+        <p:nvSpPr>
+          <p:cNvPr id="83" name="TextBox 82"/>
+          <p:cNvSpPr txBox="1"/>
+          <p:nvPr/>
+        </p:nvSpPr>
+        <p:spPr>
+          <a:xfrm>
+            <a:off x="1965960" y="31912385"/>
+            <a:ext cx="21945600" cy="777240"/>
           </a:xfrm>
           <a:prstGeom prst="rect">
             <a:avLst/>
@@ -5520,431 +6770,35 @@
               </a:spcAft>
             </a:pPr>
             <a:r>
-              <a:rPr sz="4000" b="1">
-                <a:solidFill>
-                  <a:srgbClr val="F5B020"/>
+              <a:rPr sz="4200" b="1">
+                <a:solidFill>
+                  <a:srgbClr val="1E3A8A"/>
                 </a:solidFill>
                 <a:latin typeface="Microsoft JhengHei"/>
                 <a:ea typeface="Microsoft JhengHei"/>
                 <a:cs typeface="Microsoft JhengHei"/>
               </a:rPr>
-              <a:t>1,232</a:t>
-            </a:r>
-          </a:p>
-        </p:txBody>
-      </p:sp>
-      <p:sp>
-        <p:nvSpPr>
-          <p:cNvPr id="58" name="TextBox 57"/>
-          <p:cNvSpPr txBox="1"/>
-          <p:nvPr/>
-        </p:nvSpPr>
-        <p:spPr>
-          <a:xfrm>
-            <a:off x="18141696" y="33603425"/>
-            <a:ext cx="7772400" cy="457200"/>
+              <a:t>運行實況 — 真實模型、實機鏈路</a:t>
+            </a:r>
+          </a:p>
+        </p:txBody>
+      </p:sp>
+      <p:sp>
+        <p:nvSpPr>
+          <p:cNvPr id="84" name="Rectangle 83"/>
+          <p:cNvSpPr/>
+          <p:nvPr/>
+        </p:nvSpPr>
+        <p:spPr>
+          <a:xfrm>
+            <a:off x="1993391" y="32753633"/>
+            <a:ext cx="1554480" cy="68580"/>
           </a:xfrm>
           <a:prstGeom prst="rect">
             <a:avLst/>
           </a:prstGeom>
-          <a:noFill/>
-        </p:spPr>
-        <p:txBody>
-          <a:bodyPr wrap="square" anchor="t" lIns="0" rIns="0" tIns="0" bIns="0">
-            <a:spAutoFit/>
-          </a:bodyPr>
-          <a:lstStyle/>
-          <a:p>
-            <a:pPr algn="l">
-              <a:lnSpc>
-                <a:spcPct val="112000"/>
-              </a:lnSpc>
-              <a:spcAft>
-                <a:spcPts val="0"/>
-              </a:spcAft>
-            </a:pPr>
-            <a:r>
-              <a:rPr sz="2100" b="0">
-                <a:solidFill>
-                  <a:srgbClr val="C6D2EE"/>
-                </a:solidFill>
-                <a:latin typeface="Microsoft JhengHei"/>
-                <a:ea typeface="Microsoft JhengHei"/>
-                <a:cs typeface="Microsoft JhengHei"/>
-              </a:rPr>
-              <a:t>後端測試全綠</a:t>
-            </a:r>
-          </a:p>
-        </p:txBody>
-      </p:sp>
-      <p:sp>
-        <p:nvSpPr>
-          <p:cNvPr id="59" name="TextBox 58"/>
-          <p:cNvSpPr txBox="1"/>
-          <p:nvPr/>
-        </p:nvSpPr>
-        <p:spPr>
-          <a:xfrm>
-            <a:off x="18141696" y="34220645"/>
-            <a:ext cx="7772400" cy="731520"/>
-          </a:xfrm>
-          <a:prstGeom prst="rect">
-            <a:avLst/>
-          </a:prstGeom>
-          <a:noFill/>
-        </p:spPr>
-        <p:txBody>
-          <a:bodyPr wrap="square" anchor="t" lIns="0" rIns="0" tIns="0" bIns="0">
-            <a:spAutoFit/>
-          </a:bodyPr>
-          <a:lstStyle/>
-          <a:p>
-            <a:pPr algn="l">
-              <a:lnSpc>
-                <a:spcPct val="112000"/>
-              </a:lnSpc>
-              <a:spcAft>
-                <a:spcPts val="0"/>
-              </a:spcAft>
-            </a:pPr>
-            <a:r>
-              <a:rPr sz="4000" b="1">
-                <a:solidFill>
-                  <a:srgbClr val="F5B020"/>
-                </a:solidFill>
-                <a:latin typeface="Microsoft JhengHei"/>
-                <a:ea typeface="Microsoft JhengHei"/>
-                <a:cs typeface="Microsoft JhengHei"/>
-              </a:rPr>
-              <a:t>73</a:t>
-            </a:r>
-          </a:p>
-        </p:txBody>
-      </p:sp>
-      <p:sp>
-        <p:nvSpPr>
-          <p:cNvPr id="60" name="TextBox 59"/>
-          <p:cNvSpPr txBox="1"/>
-          <p:nvPr/>
-        </p:nvSpPr>
-        <p:spPr>
-          <a:xfrm>
-            <a:off x="18141696" y="34746425"/>
-            <a:ext cx="7772400" cy="457200"/>
-          </a:xfrm>
-          <a:prstGeom prst="rect">
-            <a:avLst/>
-          </a:prstGeom>
-          <a:noFill/>
-        </p:spPr>
-        <p:txBody>
-          <a:bodyPr wrap="square" anchor="t" lIns="0" rIns="0" tIns="0" bIns="0">
-            <a:spAutoFit/>
-          </a:bodyPr>
-          <a:lstStyle/>
-          <a:p>
-            <a:pPr algn="l">
-              <a:lnSpc>
-                <a:spcPct val="112000"/>
-              </a:lnSpc>
-              <a:spcAft>
-                <a:spcPts val="0"/>
-              </a:spcAft>
-            </a:pPr>
-            <a:r>
-              <a:rPr sz="2100" b="0">
-                <a:solidFill>
-                  <a:srgbClr val="C6D2EE"/>
-                </a:solidFill>
-                <a:latin typeface="Microsoft JhengHei"/>
-                <a:ea typeface="Microsoft JhengHei"/>
-                <a:cs typeface="Microsoft JhengHei"/>
-              </a:rPr>
-              <a:t>前端 E2E 全綠</a:t>
-            </a:r>
-          </a:p>
-        </p:txBody>
-      </p:sp>
-      <p:sp>
-        <p:nvSpPr>
-          <p:cNvPr id="61" name="TextBox 60"/>
-          <p:cNvSpPr txBox="1"/>
-          <p:nvPr/>
-        </p:nvSpPr>
-        <p:spPr>
-          <a:xfrm>
-            <a:off x="18141696" y="35363645"/>
-            <a:ext cx="7772400" cy="731520"/>
-          </a:xfrm>
-          <a:prstGeom prst="rect">
-            <a:avLst/>
-          </a:prstGeom>
-          <a:noFill/>
-        </p:spPr>
-        <p:txBody>
-          <a:bodyPr wrap="square" anchor="t" lIns="0" rIns="0" tIns="0" bIns="0">
-            <a:spAutoFit/>
-          </a:bodyPr>
-          <a:lstStyle/>
-          <a:p>
-            <a:pPr algn="l">
-              <a:lnSpc>
-                <a:spcPct val="112000"/>
-              </a:lnSpc>
-              <a:spcAft>
-                <a:spcPts val="0"/>
-              </a:spcAft>
-            </a:pPr>
-            <a:r>
-              <a:rPr sz="4000" b="1">
-                <a:solidFill>
-                  <a:srgbClr val="F5B020"/>
-                </a:solidFill>
-                <a:latin typeface="Microsoft JhengHei"/>
-                <a:ea typeface="Microsoft JhengHei"/>
-                <a:cs typeface="Microsoft JhengHei"/>
-              </a:rPr>
-              <a:t>25 秒</a:t>
-            </a:r>
-          </a:p>
-        </p:txBody>
-      </p:sp>
-      <p:sp>
-        <p:nvSpPr>
-          <p:cNvPr id="62" name="TextBox 61"/>
-          <p:cNvSpPr txBox="1"/>
-          <p:nvPr/>
-        </p:nvSpPr>
-        <p:spPr>
-          <a:xfrm>
-            <a:off x="18141696" y="35889425"/>
-            <a:ext cx="7772400" cy="457200"/>
-          </a:xfrm>
-          <a:prstGeom prst="rect">
-            <a:avLst/>
-          </a:prstGeom>
-          <a:noFill/>
-        </p:spPr>
-        <p:txBody>
-          <a:bodyPr wrap="square" anchor="t" lIns="0" rIns="0" tIns="0" bIns="0">
-            <a:spAutoFit/>
-          </a:bodyPr>
-          <a:lstStyle/>
-          <a:p>
-            <a:pPr algn="l">
-              <a:lnSpc>
-                <a:spcPct val="112000"/>
-              </a:lnSpc>
-              <a:spcAft>
-                <a:spcPts val="0"/>
-              </a:spcAft>
-            </a:pPr>
-            <a:r>
-              <a:rPr sz="2100" b="0">
-                <a:solidFill>
-                  <a:srgbClr val="C6D2EE"/>
-                </a:solidFill>
-                <a:latin typeface="Microsoft JhengHei"/>
-                <a:ea typeface="Microsoft JhengHei"/>
-                <a:cs typeface="Microsoft JhengHei"/>
-              </a:rPr>
-              <a:t>實機全鏈路分析</a:t>
-            </a:r>
-          </a:p>
-        </p:txBody>
-      </p:sp>
-      <p:sp>
-        <p:nvSpPr>
-          <p:cNvPr id="63" name="TextBox 62"/>
-          <p:cNvSpPr txBox="1"/>
-          <p:nvPr/>
-        </p:nvSpPr>
-        <p:spPr>
-          <a:xfrm>
-            <a:off x="18141696" y="36506645"/>
-            <a:ext cx="7772400" cy="731520"/>
-          </a:xfrm>
-          <a:prstGeom prst="rect">
-            <a:avLst/>
-          </a:prstGeom>
-          <a:noFill/>
-        </p:spPr>
-        <p:txBody>
-          <a:bodyPr wrap="square" anchor="t" lIns="0" rIns="0" tIns="0" bIns="0">
-            <a:spAutoFit/>
-          </a:bodyPr>
-          <a:lstStyle/>
-          <a:p>
-            <a:pPr algn="l">
-              <a:lnSpc>
-                <a:spcPct val="112000"/>
-              </a:lnSpc>
-              <a:spcAft>
-                <a:spcPts val="0"/>
-              </a:spcAft>
-            </a:pPr>
-            <a:r>
-              <a:rPr sz="4000" b="1">
-                <a:solidFill>
-                  <a:srgbClr val="F5B020"/>
-                </a:solidFill>
-                <a:latin typeface="Microsoft JhengHei"/>
-                <a:ea typeface="Microsoft JhengHei"/>
-                <a:cs typeface="Microsoft JhengHei"/>
-              </a:rPr>
-              <a:t>0</a:t>
-            </a:r>
-          </a:p>
-        </p:txBody>
-      </p:sp>
-      <p:sp>
-        <p:nvSpPr>
-          <p:cNvPr id="64" name="TextBox 63"/>
-          <p:cNvSpPr txBox="1"/>
-          <p:nvPr/>
-        </p:nvSpPr>
-        <p:spPr>
-          <a:xfrm>
-            <a:off x="18141696" y="37032425"/>
-            <a:ext cx="7772400" cy="457200"/>
-          </a:xfrm>
-          <a:prstGeom prst="rect">
-            <a:avLst/>
-          </a:prstGeom>
-          <a:noFill/>
-        </p:spPr>
-        <p:txBody>
-          <a:bodyPr wrap="square" anchor="t" lIns="0" rIns="0" tIns="0" bIns="0">
-            <a:spAutoFit/>
-          </a:bodyPr>
-          <a:lstStyle/>
-          <a:p>
-            <a:pPr algn="l">
-              <a:lnSpc>
-                <a:spcPct val="112000"/>
-              </a:lnSpc>
-              <a:spcAft>
-                <a:spcPts val="0"/>
-              </a:spcAft>
-            </a:pPr>
-            <a:r>
-              <a:rPr sz="2100" b="0">
-                <a:solidFill>
-                  <a:srgbClr val="C6D2EE"/>
-                </a:solidFill>
-                <a:latin typeface="Microsoft JhengHei"/>
-                <a:ea typeface="Microsoft JhengHei"/>
-                <a:cs typeface="Microsoft JhengHei"/>
-              </a:rPr>
-              <a:t>機密外送事件</a:t>
-            </a:r>
-          </a:p>
-        </p:txBody>
-      </p:sp>
-      <p:sp>
-        <p:nvSpPr>
-          <p:cNvPr id="65" name="TextBox 64"/>
-          <p:cNvSpPr txBox="1"/>
-          <p:nvPr/>
-        </p:nvSpPr>
-        <p:spPr>
-          <a:xfrm>
-            <a:off x="1956816" y="37599353"/>
-            <a:ext cx="7315200" cy="411480"/>
-          </a:xfrm>
-          <a:prstGeom prst="rect">
-            <a:avLst/>
-          </a:prstGeom>
-          <a:noFill/>
-        </p:spPr>
-        <p:txBody>
-          <a:bodyPr wrap="square" anchor="t" lIns="0" rIns="0" tIns="0" bIns="0">
-            <a:spAutoFit/>
-          </a:bodyPr>
-          <a:lstStyle/>
-          <a:p>
-            <a:pPr algn="l">
-              <a:lnSpc>
-                <a:spcPct val="112000"/>
-              </a:lnSpc>
-              <a:spcAft>
-                <a:spcPts val="0"/>
-              </a:spcAft>
-            </a:pPr>
-            <a:r>
-              <a:rPr sz="1800" b="0">
-                <a:solidFill>
-                  <a:srgbClr val="5A6B8C"/>
-                </a:solidFill>
-                <a:latin typeface="Microsoft JhengHei"/>
-                <a:ea typeface="Microsoft JhengHei"/>
-                <a:cs typeface="Microsoft JhengHei"/>
-              </a:rPr>
-              <a:t>qwen2.5:7b 正確抓出請求項 9 缺先行詞，產出繁中草稿</a:t>
-            </a:r>
-          </a:p>
-        </p:txBody>
-      </p:sp>
-      <p:sp>
-        <p:nvSpPr>
-          <p:cNvPr id="66" name="TextBox 65"/>
-          <p:cNvSpPr txBox="1"/>
-          <p:nvPr/>
-        </p:nvSpPr>
-        <p:spPr>
-          <a:xfrm>
-            <a:off x="9729216" y="37599353"/>
-            <a:ext cx="7315200" cy="411480"/>
-          </a:xfrm>
-          <a:prstGeom prst="rect">
-            <a:avLst/>
-          </a:prstGeom>
-          <a:noFill/>
-        </p:spPr>
-        <p:txBody>
-          <a:bodyPr wrap="square" anchor="t" lIns="0" rIns="0" tIns="0" bIns="0">
-            <a:spAutoFit/>
-          </a:bodyPr>
-          <a:lstStyle/>
-          <a:p>
-            <a:pPr algn="l">
-              <a:lnSpc>
-                <a:spcPct val="112000"/>
-              </a:lnSpc>
-              <a:spcAft>
-                <a:spcPts val="0"/>
-              </a:spcAft>
-            </a:pPr>
-            <a:r>
-              <a:rPr sz="1800" b="0">
-                <a:solidFill>
-                  <a:srgbClr val="5A6B8C"/>
-                </a:solidFill>
-                <a:latin typeface="Microsoft JhengHei"/>
-                <a:ea typeface="Microsoft JhengHei"/>
-                <a:cs typeface="Microsoft JhengHei"/>
-              </a:rPr>
-              <a:t>稽核鏈一鍵驗證：29 筆紀錄 0 不一致，竄改即現形</a:t>
-            </a:r>
-          </a:p>
-        </p:txBody>
-      </p:sp>
-      <p:sp>
-        <p:nvSpPr>
-          <p:cNvPr id="67" name="Rectangle 66"/>
-          <p:cNvSpPr/>
-          <p:nvPr/>
-        </p:nvSpPr>
-        <p:spPr>
-          <a:xfrm>
-            <a:off x="0" y="37984176"/>
-            <a:ext cx="28328112" cy="1325880"/>
-          </a:xfrm>
-          <a:prstGeom prst="rect">
-            <a:avLst/>
-          </a:prstGeom>
           <a:solidFill>
-            <a:srgbClr val="1E3A8A"/>
+            <a:srgbClr val="F5B020"/>
           </a:solidFill>
           <a:ln>
             <a:noFill/>
@@ -5973,16 +6827,99 @@
           </a:p>
         </p:txBody>
       </p:sp>
-      <p:sp>
-        <p:nvSpPr>
-          <p:cNvPr id="68" name="TextBox 67"/>
+      <p:pic>
+        <p:nvPicPr>
+          <p:cNvPr id="85" name="Picture 84" descr="real_05_result_real_qwen.png"/>
+          <p:cNvPicPr>
+            <a:picLocks noChangeAspect="1"/>
+          </p:cNvPicPr>
+          <p:nvPr/>
+        </p:nvPicPr>
+        <p:blipFill>
+          <a:blip r:embed="rId8"/>
+          <a:stretch>
+            <a:fillRect/>
+          </a:stretch>
+        </p:blipFill>
+        <p:spPr>
+          <a:xfrm rot="21516000">
+            <a:off x="914400" y="33110249"/>
+            <a:ext cx="5705856" cy="3566160"/>
+          </a:xfrm>
+          <a:prstGeom prst="rect">
+            <a:avLst/>
+          </a:prstGeom>
+          <a:effectLst>
+            <a:outerShdw blurRad="110000" dist="42000" dir="5400000" rotWithShape="0">
+              <a:srgbClr val="1A2236">
+                <a:alpha val="24000"/>
+              </a:srgbClr>
+            </a:outerShdw>
+          </a:effectLst>
+        </p:spPr>
+      </p:pic>
+      <p:sp>
+        <p:nvSpPr>
+          <p:cNvPr id="86" name="Rounded Rectangle 85"/>
+          <p:cNvSpPr/>
+          <p:nvPr/>
+        </p:nvSpPr>
+        <p:spPr>
+          <a:xfrm>
+            <a:off x="1325880" y="36420377"/>
+            <a:ext cx="4882896" cy="530352"/>
+          </a:xfrm>
+          <a:prstGeom prst="roundRect">
+            <a:avLst>
+              <a:gd name="adj" fmla="val 50000"/>
+            </a:avLst>
+          </a:prstGeom>
+          <a:solidFill>
+            <a:srgbClr val="FFFFFF"/>
+          </a:solidFill>
+          <a:ln>
+            <a:noFill/>
+          </a:ln>
+          <a:effectLst>
+            <a:outerShdw blurRad="110000" dist="42000" dir="5400000" rotWithShape="0">
+              <a:srgbClr val="1A2236">
+                <a:alpha val="24000"/>
+              </a:srgbClr>
+            </a:outerShdw>
+          </a:effectLst>
+        </p:spPr>
+        <p:style>
+          <a:lnRef idx="1">
+            <a:schemeClr val="accent1"/>
+          </a:lnRef>
+          <a:fillRef idx="3">
+            <a:schemeClr val="accent1"/>
+          </a:fillRef>
+          <a:effectRef idx="2">
+            <a:schemeClr val="accent1"/>
+          </a:effectRef>
+          <a:fontRef idx="minor">
+            <a:schemeClr val="lt1"/>
+          </a:fontRef>
+        </p:style>
+        <p:txBody>
+          <a:bodyPr rtlCol="0" anchor="ctr"/>
+          <a:lstStyle/>
+          <a:p>
+            <a:pPr algn="ctr"/>
+          </a:p>
+        </p:txBody>
+      </p:sp>
+      <p:sp>
+        <p:nvSpPr>
+          <p:cNvPr id="87" name="TextBox 86"/>
           <p:cNvSpPr txBox="1"/>
           <p:nvPr/>
         </p:nvSpPr>
         <p:spPr>
           <a:xfrm>
-            <a:off x="1097280" y="38368224"/>
-            <a:ext cx="26133552" cy="640080"/>
+            <a:off x="1325880" y="36420377"/>
+            <a:ext cx="4882896" cy="530352"/>
           </a:xfrm>
           <a:prstGeom prst="rect">
             <a:avLst/>
@@ -5990,7 +6927,7 @@
           <a:noFill/>
         </p:spPr>
         <p:txBody>
-          <a:bodyPr wrap="square" anchor="t" lIns="0" rIns="0" tIns="0" bIns="0">
+          <a:bodyPr wrap="square" anchor="ctr" lIns="0" rIns="0" tIns="0" bIns="0">
             <a:spAutoFit/>
           </a:bodyPr>
           <a:lstStyle/>
@@ -6004,7 +6941,697 @@
               </a:spcAft>
             </a:pPr>
             <a:r>
-              <a:rPr sz="2800" b="0">
+              <a:rPr sz="1700" b="1">
+                <a:solidFill>
+                  <a:srgbClr val="1E3A8A"/>
+                </a:solidFill>
+                <a:latin typeface="Microsoft JhengHei"/>
+                <a:ea typeface="Microsoft JhengHei"/>
+                <a:cs typeface="Microsoft JhengHei"/>
+              </a:rPr>
+              <a:t>qwen2.5:7b 正確抓出請求項 9 缺先行詞</a:t>
+            </a:r>
+          </a:p>
+        </p:txBody>
+      </p:sp>
+      <p:pic>
+        <p:nvPicPr>
+          <p:cNvPr id="88" name="Picture 87" descr="real_08_chain_verified.png"/>
+          <p:cNvPicPr>
+            <a:picLocks noChangeAspect="1"/>
+          </p:cNvPicPr>
+          <p:nvPr/>
+        </p:nvPicPr>
+        <p:blipFill>
+          <a:blip r:embed="rId9"/>
+          <a:stretch>
+            <a:fillRect/>
+          </a:stretch>
+        </p:blipFill>
+        <p:spPr>
+          <a:xfrm rot="84000">
+            <a:off x="7123176" y="33110249"/>
+            <a:ext cx="5705856" cy="3566160"/>
+          </a:xfrm>
+          <a:prstGeom prst="rect">
+            <a:avLst/>
+          </a:prstGeom>
+          <a:effectLst>
+            <a:outerShdw blurRad="110000" dist="42000" dir="5400000" rotWithShape="0">
+              <a:srgbClr val="1A2236">
+                <a:alpha val="24000"/>
+              </a:srgbClr>
+            </a:outerShdw>
+          </a:effectLst>
+        </p:spPr>
+      </p:pic>
+      <p:sp>
+        <p:nvSpPr>
+          <p:cNvPr id="89" name="Rounded Rectangle 88"/>
+          <p:cNvSpPr/>
+          <p:nvPr/>
+        </p:nvSpPr>
+        <p:spPr>
+          <a:xfrm>
+            <a:off x="7534656" y="36420377"/>
+            <a:ext cx="4882896" cy="530352"/>
+          </a:xfrm>
+          <a:prstGeom prst="roundRect">
+            <a:avLst>
+              <a:gd name="adj" fmla="val 50000"/>
+            </a:avLst>
+          </a:prstGeom>
+          <a:solidFill>
+            <a:srgbClr val="FFFFFF"/>
+          </a:solidFill>
+          <a:ln>
+            <a:noFill/>
+          </a:ln>
+          <a:effectLst>
+            <a:outerShdw blurRad="110000" dist="42000" dir="5400000" rotWithShape="0">
+              <a:srgbClr val="1A2236">
+                <a:alpha val="24000"/>
+              </a:srgbClr>
+            </a:outerShdw>
+          </a:effectLst>
+        </p:spPr>
+        <p:style>
+          <a:lnRef idx="1">
+            <a:schemeClr val="accent1"/>
+          </a:lnRef>
+          <a:fillRef idx="3">
+            <a:schemeClr val="accent1"/>
+          </a:fillRef>
+          <a:effectRef idx="2">
+            <a:schemeClr val="accent1"/>
+          </a:effectRef>
+          <a:fontRef idx="minor">
+            <a:schemeClr val="lt1"/>
+          </a:fontRef>
+        </p:style>
+        <p:txBody>
+          <a:bodyPr rtlCol="0" anchor="ctr"/>
+          <a:lstStyle/>
+          <a:p>
+            <a:pPr algn="ctr"/>
+          </a:p>
+        </p:txBody>
+      </p:sp>
+      <p:sp>
+        <p:nvSpPr>
+          <p:cNvPr id="90" name="TextBox 89"/>
+          <p:cNvSpPr txBox="1"/>
+          <p:nvPr/>
+        </p:nvSpPr>
+        <p:spPr>
+          <a:xfrm>
+            <a:off x="7534656" y="36420377"/>
+            <a:ext cx="4882896" cy="530352"/>
+          </a:xfrm>
+          <a:prstGeom prst="rect">
+            <a:avLst/>
+          </a:prstGeom>
+          <a:noFill/>
+        </p:spPr>
+        <p:txBody>
+          <a:bodyPr wrap="square" anchor="ctr" lIns="0" rIns="0" tIns="0" bIns="0">
+            <a:spAutoFit/>
+          </a:bodyPr>
+          <a:lstStyle/>
+          <a:p>
+            <a:pPr algn="ctr">
+              <a:lnSpc>
+                <a:spcPct val="112000"/>
+              </a:lnSpc>
+              <a:spcAft>
+                <a:spcPts val="0"/>
+              </a:spcAft>
+            </a:pPr>
+            <a:r>
+              <a:rPr sz="1700" b="1">
+                <a:solidFill>
+                  <a:srgbClr val="1E3A8A"/>
+                </a:solidFill>
+                <a:latin typeface="Microsoft JhengHei"/>
+                <a:ea typeface="Microsoft JhengHei"/>
+                <a:cs typeface="Microsoft JhengHei"/>
+              </a:rPr>
+              <a:t>稽核鏈一鍵驗證：29 筆紀錄 0 不一致</a:t>
+            </a:r>
+          </a:p>
+        </p:txBody>
+      </p:sp>
+      <p:sp>
+        <p:nvSpPr>
+          <p:cNvPr id="91" name="Rounded Rectangle 90"/>
+          <p:cNvSpPr/>
+          <p:nvPr/>
+        </p:nvSpPr>
+        <p:spPr>
+          <a:xfrm>
+            <a:off x="13560552" y="33110249"/>
+            <a:ext cx="13853159" cy="3566160"/>
+          </a:xfrm>
+          <a:prstGeom prst="roundRect">
+            <a:avLst>
+              <a:gd name="adj" fmla="val 7000"/>
+            </a:avLst>
+          </a:prstGeom>
+          <a:solidFill>
+            <a:srgbClr val="12245C"/>
+          </a:solidFill>
+          <a:ln>
+            <a:noFill/>
+          </a:ln>
+          <a:effectLst>
+            <a:outerShdw blurRad="110000" dist="42000" dir="5400000" rotWithShape="0">
+              <a:srgbClr val="1A2236">
+                <a:alpha val="24000"/>
+              </a:srgbClr>
+            </a:outerShdw>
+          </a:effectLst>
+        </p:spPr>
+        <p:style>
+          <a:lnRef idx="1">
+            <a:schemeClr val="accent1"/>
+          </a:lnRef>
+          <a:fillRef idx="3">
+            <a:schemeClr val="accent1"/>
+          </a:fillRef>
+          <a:effectRef idx="2">
+            <a:schemeClr val="accent1"/>
+          </a:effectRef>
+          <a:fontRef idx="minor">
+            <a:schemeClr val="lt1"/>
+          </a:fontRef>
+        </p:style>
+        <p:txBody>
+          <a:bodyPr rtlCol="0" anchor="ctr"/>
+          <a:lstStyle/>
+          <a:p>
+            <a:pPr algn="ctr"/>
+          </a:p>
+        </p:txBody>
+      </p:sp>
+      <p:sp>
+        <p:nvSpPr>
+          <p:cNvPr id="92" name="TextBox 91"/>
+          <p:cNvSpPr txBox="1"/>
+          <p:nvPr/>
+        </p:nvSpPr>
+        <p:spPr>
+          <a:xfrm>
+            <a:off x="14109192" y="34024649"/>
+            <a:ext cx="3006089" cy="914400"/>
+          </a:xfrm>
+          <a:prstGeom prst="rect">
+            <a:avLst/>
+          </a:prstGeom>
+          <a:noFill/>
+        </p:spPr>
+        <p:txBody>
+          <a:bodyPr wrap="square" anchor="t" lIns="0" rIns="0" tIns="0" bIns="0">
+            <a:spAutoFit/>
+          </a:bodyPr>
+          <a:lstStyle/>
+          <a:p>
+            <a:pPr algn="ctr">
+              <a:lnSpc>
+                <a:spcPct val="112000"/>
+              </a:lnSpc>
+              <a:spcAft>
+                <a:spcPts val="0"/>
+              </a:spcAft>
+            </a:pPr>
+            <a:r>
+              <a:rPr sz="4400" b="1">
+                <a:solidFill>
+                  <a:srgbClr val="F5B020"/>
+                </a:solidFill>
+                <a:latin typeface="Microsoft JhengHei"/>
+                <a:ea typeface="Microsoft JhengHei"/>
+                <a:cs typeface="Microsoft JhengHei"/>
+              </a:rPr>
+              <a:t>1,232</a:t>
+            </a:r>
+          </a:p>
+        </p:txBody>
+      </p:sp>
+      <p:sp>
+        <p:nvSpPr>
+          <p:cNvPr id="93" name="TextBox 92"/>
+          <p:cNvSpPr txBox="1"/>
+          <p:nvPr/>
+        </p:nvSpPr>
+        <p:spPr>
+          <a:xfrm>
+            <a:off x="14109192" y="35076209"/>
+            <a:ext cx="3006089" cy="548640"/>
+          </a:xfrm>
+          <a:prstGeom prst="rect">
+            <a:avLst/>
+          </a:prstGeom>
+          <a:noFill/>
+        </p:spPr>
+        <p:txBody>
+          <a:bodyPr wrap="square" anchor="t" lIns="0" rIns="0" tIns="0" bIns="0">
+            <a:spAutoFit/>
+          </a:bodyPr>
+          <a:lstStyle/>
+          <a:p>
+            <a:pPr algn="ctr">
+              <a:lnSpc>
+                <a:spcPct val="112000"/>
+              </a:lnSpc>
+              <a:spcAft>
+                <a:spcPts val="0"/>
+              </a:spcAft>
+            </a:pPr>
+            <a:r>
+              <a:rPr sz="1900" b="0">
+                <a:solidFill>
+                  <a:srgbClr val="C6D2EE"/>
+                </a:solidFill>
+                <a:latin typeface="Microsoft JhengHei"/>
+                <a:ea typeface="Microsoft JhengHei"/>
+                <a:cs typeface="Microsoft JhengHei"/>
+              </a:rPr>
+              <a:t>後端測試全綠</a:t>
+            </a:r>
+          </a:p>
+        </p:txBody>
+      </p:sp>
+      <p:sp>
+        <p:nvSpPr>
+          <p:cNvPr id="94" name="TextBox 93"/>
+          <p:cNvSpPr txBox="1"/>
+          <p:nvPr/>
+        </p:nvSpPr>
+        <p:spPr>
+          <a:xfrm>
+            <a:off x="17298162" y="34024649"/>
+            <a:ext cx="3006089" cy="914400"/>
+          </a:xfrm>
+          <a:prstGeom prst="rect">
+            <a:avLst/>
+          </a:prstGeom>
+          <a:noFill/>
+        </p:spPr>
+        <p:txBody>
+          <a:bodyPr wrap="square" anchor="t" lIns="0" rIns="0" tIns="0" bIns="0">
+            <a:spAutoFit/>
+          </a:bodyPr>
+          <a:lstStyle/>
+          <a:p>
+            <a:pPr algn="ctr">
+              <a:lnSpc>
+                <a:spcPct val="112000"/>
+              </a:lnSpc>
+              <a:spcAft>
+                <a:spcPts val="0"/>
+              </a:spcAft>
+            </a:pPr>
+            <a:r>
+              <a:rPr sz="4400" b="1">
+                <a:solidFill>
+                  <a:srgbClr val="F5B020"/>
+                </a:solidFill>
+                <a:latin typeface="Microsoft JhengHei"/>
+                <a:ea typeface="Microsoft JhengHei"/>
+                <a:cs typeface="Microsoft JhengHei"/>
+              </a:rPr>
+              <a:t>73</a:t>
+            </a:r>
+          </a:p>
+        </p:txBody>
+      </p:sp>
+      <p:sp>
+        <p:nvSpPr>
+          <p:cNvPr id="95" name="TextBox 94"/>
+          <p:cNvSpPr txBox="1"/>
+          <p:nvPr/>
+        </p:nvSpPr>
+        <p:spPr>
+          <a:xfrm>
+            <a:off x="17298162" y="35076209"/>
+            <a:ext cx="3006089" cy="548640"/>
+          </a:xfrm>
+          <a:prstGeom prst="rect">
+            <a:avLst/>
+          </a:prstGeom>
+          <a:noFill/>
+        </p:spPr>
+        <p:txBody>
+          <a:bodyPr wrap="square" anchor="t" lIns="0" rIns="0" tIns="0" bIns="0">
+            <a:spAutoFit/>
+          </a:bodyPr>
+          <a:lstStyle/>
+          <a:p>
+            <a:pPr algn="ctr">
+              <a:lnSpc>
+                <a:spcPct val="112000"/>
+              </a:lnSpc>
+              <a:spcAft>
+                <a:spcPts val="0"/>
+              </a:spcAft>
+            </a:pPr>
+            <a:r>
+              <a:rPr sz="1900" b="0">
+                <a:solidFill>
+                  <a:srgbClr val="C6D2EE"/>
+                </a:solidFill>
+                <a:latin typeface="Microsoft JhengHei"/>
+                <a:ea typeface="Microsoft JhengHei"/>
+                <a:cs typeface="Microsoft JhengHei"/>
+              </a:rPr>
+              <a:t>前端 E2E 全綠</a:t>
+            </a:r>
+          </a:p>
+        </p:txBody>
+      </p:sp>
+      <p:sp>
+        <p:nvSpPr>
+          <p:cNvPr id="96" name="TextBox 95"/>
+          <p:cNvSpPr txBox="1"/>
+          <p:nvPr/>
+        </p:nvSpPr>
+        <p:spPr>
+          <a:xfrm>
+            <a:off x="20487132" y="34024649"/>
+            <a:ext cx="3006089" cy="914400"/>
+          </a:xfrm>
+          <a:prstGeom prst="rect">
+            <a:avLst/>
+          </a:prstGeom>
+          <a:noFill/>
+        </p:spPr>
+        <p:txBody>
+          <a:bodyPr wrap="square" anchor="t" lIns="0" rIns="0" tIns="0" bIns="0">
+            <a:spAutoFit/>
+          </a:bodyPr>
+          <a:lstStyle/>
+          <a:p>
+            <a:pPr algn="ctr">
+              <a:lnSpc>
+                <a:spcPct val="112000"/>
+              </a:lnSpc>
+              <a:spcAft>
+                <a:spcPts val="0"/>
+              </a:spcAft>
+            </a:pPr>
+            <a:r>
+              <a:rPr sz="4400" b="1">
+                <a:solidFill>
+                  <a:srgbClr val="F5B020"/>
+                </a:solidFill>
+                <a:latin typeface="Microsoft JhengHei"/>
+                <a:ea typeface="Microsoft JhengHei"/>
+                <a:cs typeface="Microsoft JhengHei"/>
+              </a:rPr>
+              <a:t>25 秒</a:t>
+            </a:r>
+          </a:p>
+        </p:txBody>
+      </p:sp>
+      <p:sp>
+        <p:nvSpPr>
+          <p:cNvPr id="97" name="TextBox 96"/>
+          <p:cNvSpPr txBox="1"/>
+          <p:nvPr/>
+        </p:nvSpPr>
+        <p:spPr>
+          <a:xfrm>
+            <a:off x="20487132" y="35076209"/>
+            <a:ext cx="3006089" cy="548640"/>
+          </a:xfrm>
+          <a:prstGeom prst="rect">
+            <a:avLst/>
+          </a:prstGeom>
+          <a:noFill/>
+        </p:spPr>
+        <p:txBody>
+          <a:bodyPr wrap="square" anchor="t" lIns="0" rIns="0" tIns="0" bIns="0">
+            <a:spAutoFit/>
+          </a:bodyPr>
+          <a:lstStyle/>
+          <a:p>
+            <a:pPr algn="ctr">
+              <a:lnSpc>
+                <a:spcPct val="112000"/>
+              </a:lnSpc>
+              <a:spcAft>
+                <a:spcPts val="0"/>
+              </a:spcAft>
+            </a:pPr>
+            <a:r>
+              <a:rPr sz="1900" b="0">
+                <a:solidFill>
+                  <a:srgbClr val="C6D2EE"/>
+                </a:solidFill>
+                <a:latin typeface="Microsoft JhengHei"/>
+                <a:ea typeface="Microsoft JhengHei"/>
+                <a:cs typeface="Microsoft JhengHei"/>
+              </a:rPr>
+              <a:t>實機全鏈路分析</a:t>
+            </a:r>
+          </a:p>
+        </p:txBody>
+      </p:sp>
+      <p:sp>
+        <p:nvSpPr>
+          <p:cNvPr id="98" name="TextBox 97"/>
+          <p:cNvSpPr txBox="1"/>
+          <p:nvPr/>
+        </p:nvSpPr>
+        <p:spPr>
+          <a:xfrm>
+            <a:off x="23676102" y="34024649"/>
+            <a:ext cx="3006089" cy="914400"/>
+          </a:xfrm>
+          <a:prstGeom prst="rect">
+            <a:avLst/>
+          </a:prstGeom>
+          <a:noFill/>
+        </p:spPr>
+        <p:txBody>
+          <a:bodyPr wrap="square" anchor="t" lIns="0" rIns="0" tIns="0" bIns="0">
+            <a:spAutoFit/>
+          </a:bodyPr>
+          <a:lstStyle/>
+          <a:p>
+            <a:pPr algn="ctr">
+              <a:lnSpc>
+                <a:spcPct val="112000"/>
+              </a:lnSpc>
+              <a:spcAft>
+                <a:spcPts val="0"/>
+              </a:spcAft>
+            </a:pPr>
+            <a:r>
+              <a:rPr sz="4400" b="1">
+                <a:solidFill>
+                  <a:srgbClr val="F5B020"/>
+                </a:solidFill>
+                <a:latin typeface="Microsoft JhengHei"/>
+                <a:ea typeface="Microsoft JhengHei"/>
+                <a:cs typeface="Microsoft JhengHei"/>
+              </a:rPr>
+              <a:t>0</a:t>
+            </a:r>
+          </a:p>
+        </p:txBody>
+      </p:sp>
+      <p:sp>
+        <p:nvSpPr>
+          <p:cNvPr id="99" name="TextBox 98"/>
+          <p:cNvSpPr txBox="1"/>
+          <p:nvPr/>
+        </p:nvSpPr>
+        <p:spPr>
+          <a:xfrm>
+            <a:off x="23676102" y="35076209"/>
+            <a:ext cx="3006089" cy="548640"/>
+          </a:xfrm>
+          <a:prstGeom prst="rect">
+            <a:avLst/>
+          </a:prstGeom>
+          <a:noFill/>
+        </p:spPr>
+        <p:txBody>
+          <a:bodyPr wrap="square" anchor="t" lIns="0" rIns="0" tIns="0" bIns="0">
+            <a:spAutoFit/>
+          </a:bodyPr>
+          <a:lstStyle/>
+          <a:p>
+            <a:pPr algn="ctr">
+              <a:lnSpc>
+                <a:spcPct val="112000"/>
+              </a:lnSpc>
+              <a:spcAft>
+                <a:spcPts val="0"/>
+              </a:spcAft>
+            </a:pPr>
+            <a:r>
+              <a:rPr sz="1900" b="0">
+                <a:solidFill>
+                  <a:srgbClr val="C6D2EE"/>
+                </a:solidFill>
+                <a:latin typeface="Microsoft JhengHei"/>
+                <a:ea typeface="Microsoft JhengHei"/>
+                <a:cs typeface="Microsoft JhengHei"/>
+              </a:rPr>
+              <a:t>機密外送事件</a:t>
+            </a:r>
+          </a:p>
+        </p:txBody>
+      </p:sp>
+      <p:sp>
+        <p:nvSpPr>
+          <p:cNvPr id="100" name="Oval 99"/>
+          <p:cNvSpPr/>
+          <p:nvPr/>
+        </p:nvSpPr>
+        <p:spPr>
+          <a:xfrm rot="21000000">
+            <a:off x="26270711" y="32470169"/>
+            <a:ext cx="1508760" cy="1508760"/>
+          </a:xfrm>
+          <a:prstGeom prst="ellipse">
+            <a:avLst/>
+          </a:prstGeom>
+          <a:solidFill>
+            <a:srgbClr val="F5B020"/>
+          </a:solidFill>
+          <a:ln>
+            <a:noFill/>
+          </a:ln>
+          <a:effectLst>
+            <a:outerShdw blurRad="110000" dist="42000" dir="5400000" rotWithShape="0">
+              <a:srgbClr val="1A2236">
+                <a:alpha val="24000"/>
+              </a:srgbClr>
+            </a:outerShdw>
+          </a:effectLst>
+        </p:spPr>
+        <p:style>
+          <a:lnRef idx="1">
+            <a:schemeClr val="accent1"/>
+          </a:lnRef>
+          <a:fillRef idx="3">
+            <a:schemeClr val="accent1"/>
+          </a:fillRef>
+          <a:effectRef idx="2">
+            <a:schemeClr val="accent1"/>
+          </a:effectRef>
+          <a:fontRef idx="minor">
+            <a:schemeClr val="lt1"/>
+          </a:fontRef>
+        </p:style>
+        <p:txBody>
+          <a:bodyPr rtlCol="0" anchor="ctr"/>
+          <a:lstStyle/>
+          <a:p>
+            <a:pPr algn="ctr"/>
+          </a:p>
+        </p:txBody>
+      </p:sp>
+      <p:sp>
+        <p:nvSpPr>
+          <p:cNvPr id="101" name="TextBox 100"/>
+          <p:cNvSpPr txBox="1"/>
+          <p:nvPr/>
+        </p:nvSpPr>
+        <p:spPr>
+          <a:xfrm rot="21000000">
+            <a:off x="26270711" y="32543321"/>
+            <a:ext cx="1508760" cy="1508760"/>
+          </a:xfrm>
+          <a:prstGeom prst="rect">
+            <a:avLst/>
+          </a:prstGeom>
+          <a:noFill/>
+        </p:spPr>
+        <p:txBody>
+          <a:bodyPr wrap="square" anchor="ctr" lIns="0" rIns="0" tIns="0" bIns="0">
+            <a:spAutoFit/>
+          </a:bodyPr>
+          <a:lstStyle/>
+          <a:p>
+            <a:pPr algn="ctr">
+              <a:lnSpc>
+                <a:spcPct val="112000"/>
+              </a:lnSpc>
+              <a:spcAft>
+                <a:spcPts val="0"/>
+              </a:spcAft>
+            </a:pPr>
+            <a:r>
+              <a:rPr sz="2200" b="1">
+                <a:solidFill>
+                  <a:srgbClr val="12245C"/>
+                </a:solidFill>
+                <a:latin typeface="Microsoft JhengHei"/>
+                <a:ea typeface="Microsoft JhengHei"/>
+                <a:cs typeface="Microsoft JhengHei"/>
+              </a:rPr>
+              <a:t>ALL</a:t>
+            </a:r>
+          </a:p>
+          <a:p>
+            <a:pPr algn="ctr">
+              <a:lnSpc>
+                <a:spcPct val="112000"/>
+              </a:lnSpc>
+              <a:spcAft>
+                <a:spcPts val="0"/>
+              </a:spcAft>
+            </a:pPr>
+            <a:r>
+              <a:rPr sz="2200" b="1">
+                <a:solidFill>
+                  <a:srgbClr val="12245C"/>
+                </a:solidFill>
+                <a:latin typeface="Microsoft JhengHei"/>
+                <a:ea typeface="Microsoft JhengHei"/>
+                <a:cs typeface="Microsoft JhengHei"/>
+              </a:rPr>
+              <a:t>GREEN</a:t>
+            </a:r>
+          </a:p>
+        </p:txBody>
+      </p:sp>
+      <p:sp>
+        <p:nvSpPr>
+          <p:cNvPr id="102" name="TextBox 101"/>
+          <p:cNvSpPr txBox="1"/>
+          <p:nvPr/>
+        </p:nvSpPr>
+        <p:spPr>
+          <a:xfrm>
+            <a:off x="1097280" y="38349936"/>
+            <a:ext cx="26133552" cy="640080"/>
+          </a:xfrm>
+          <a:prstGeom prst="rect">
+            <a:avLst/>
+          </a:prstGeom>
+          <a:noFill/>
+        </p:spPr>
+        <p:txBody>
+          <a:bodyPr wrap="square" anchor="t" lIns="0" rIns="0" tIns="0" bIns="0">
+            <a:spAutoFit/>
+          </a:bodyPr>
+          <a:lstStyle/>
+          <a:p>
+            <a:pPr algn="ctr">
+              <a:lnSpc>
+                <a:spcPct val="112000"/>
+              </a:lnSpc>
+              <a:spcAft>
+                <a:spcPts val="0"/>
+              </a:spcAft>
+            </a:pPr>
+            <a:r>
+              <a:rPr sz="2700" b="0">
                 <a:solidFill>
                   <a:srgbClr val="C6D2EE"/>
                 </a:solidFill>
@@ -6015,7 +7642,7 @@
               <a:t>實機整合 TPIsoftware digiRunner × Dify　·　本地模型 qwen2.5:7b　·　</a:t>
             </a:r>
             <a:r>
-              <a:rPr sz="2800" b="1">
+              <a:rPr sz="2700" b="1">
                 <a:solidFill>
                   <a:srgbClr val="FFFFFF"/>
                 </a:solidFill>
